--- a/chapter2/chapter2.pptx
+++ b/chapter2/chapter2.pptx
@@ -9368,10 +9368,12 @@
           </a:bodyPr>
           <a:lstStyle/>
           <a:p>
-            <a:pPr>
-              <a:spcAft>
-                <a:spcPts val="1000"/>
-              </a:spcAft>
+            <a:pPr lvl="0" marL="457200" indent="-228600">
+              <a:buFont typeface="Calibri"/>
+              <a:spcAft>
+                <a:spcPts val="1000"/>
+              </a:spcAft>
+              <a:buSzPct val="100000"/>
               <a:buChar char="•"/>
               <a:lnSpc>
                 <a:spcPts val="2200"/>
@@ -9388,10 +9390,12 @@
             </a:r>
           </a:p>
           <a:p>
-            <a:pPr>
-              <a:spcAft>
-                <a:spcPts val="1000"/>
-              </a:spcAft>
+            <a:pPr lvl="0" marL="457200" indent="-228600">
+              <a:buFont typeface="Calibri"/>
+              <a:spcAft>
+                <a:spcPts val="1000"/>
+              </a:spcAft>
+              <a:buSzPct val="100000"/>
               <a:buChar char="•"/>
               <a:lnSpc>
                 <a:spcPts val="2200"/>
@@ -9408,10 +9412,12 @@
             </a:r>
           </a:p>
           <a:p>
-            <a:pPr>
-              <a:spcAft>
-                <a:spcPts val="1000"/>
-              </a:spcAft>
+            <a:pPr lvl="0" marL="457200" indent="-228600">
+              <a:buFont typeface="Calibri"/>
+              <a:spcAft>
+                <a:spcPts val="1000"/>
+              </a:spcAft>
+              <a:buSzPct val="100000"/>
               <a:buChar char="•"/>
               <a:lnSpc>
                 <a:spcPts val="2200"/>
@@ -9547,10 +9553,12 @@
           </a:bodyPr>
           <a:lstStyle/>
           <a:p>
-            <a:pPr>
-              <a:spcAft>
-                <a:spcPts val="1000"/>
-              </a:spcAft>
+            <a:pPr lvl="0" marL="457200" indent="-228600">
+              <a:buFont typeface="Calibri"/>
+              <a:spcAft>
+                <a:spcPts val="1000"/>
+              </a:spcAft>
+              <a:buSzPct val="100000"/>
               <a:buChar char="•"/>
               <a:lnSpc>
                 <a:spcPts val="2200"/>
@@ -9567,10 +9575,12 @@
             </a:r>
           </a:p>
           <a:p>
-            <a:pPr>
-              <a:spcAft>
-                <a:spcPts val="1000"/>
-              </a:spcAft>
+            <a:pPr lvl="0" marL="457200" indent="-228600">
+              <a:buFont typeface="Calibri"/>
+              <a:spcAft>
+                <a:spcPts val="1000"/>
+              </a:spcAft>
+              <a:buSzPct val="100000"/>
               <a:buChar char="•"/>
               <a:lnSpc>
                 <a:spcPts val="2200"/>
@@ -9587,10 +9597,12 @@
             </a:r>
           </a:p>
           <a:p>
-            <a:pPr>
-              <a:spcAft>
-                <a:spcPts val="1000"/>
-              </a:spcAft>
+            <a:pPr lvl="0" marL="457200" indent="-228600">
+              <a:buFont typeface="Calibri"/>
+              <a:spcAft>
+                <a:spcPts val="1000"/>
+              </a:spcAft>
+              <a:buSzPct val="100000"/>
               <a:buChar char="•"/>
               <a:lnSpc>
                 <a:spcPts val="2200"/>
@@ -9607,10 +9619,12 @@
             </a:r>
           </a:p>
           <a:p>
-            <a:pPr>
-              <a:spcAft>
-                <a:spcPts val="1000"/>
-              </a:spcAft>
+            <a:pPr lvl="0" marL="457200" indent="-228600">
+              <a:buFont typeface="Calibri"/>
+              <a:spcAft>
+                <a:spcPts val="1000"/>
+              </a:spcAft>
+              <a:buSzPct val="100000"/>
               <a:buChar char="•"/>
               <a:lnSpc>
                 <a:spcPts val="2200"/>
@@ -9746,10 +9760,12 @@
           </a:bodyPr>
           <a:lstStyle/>
           <a:p>
-            <a:pPr>
-              <a:spcAft>
-                <a:spcPts val="1000"/>
-              </a:spcAft>
+            <a:pPr lvl="0" marL="457200" indent="-228600">
+              <a:buFont typeface="Calibri"/>
+              <a:spcAft>
+                <a:spcPts val="1000"/>
+              </a:spcAft>
+              <a:buSzPct val="100000"/>
               <a:buChar char="•"/>
               <a:lnSpc>
                 <a:spcPts val="2200"/>
@@ -9766,10 +9782,12 @@
             </a:r>
           </a:p>
           <a:p>
-            <a:pPr>
-              <a:spcAft>
-                <a:spcPts val="1000"/>
-              </a:spcAft>
+            <a:pPr lvl="0" marL="457200" indent="-228600">
+              <a:buFont typeface="Calibri"/>
+              <a:spcAft>
+                <a:spcPts val="1000"/>
+              </a:spcAft>
+              <a:buSzPct val="100000"/>
               <a:buChar char="•"/>
               <a:lnSpc>
                 <a:spcPts val="2200"/>
@@ -9786,10 +9804,12 @@
             </a:r>
           </a:p>
           <a:p>
-            <a:pPr>
-              <a:spcAft>
-                <a:spcPts val="1000"/>
-              </a:spcAft>
+            <a:pPr lvl="0" marL="457200" indent="-228600">
+              <a:buFont typeface="Calibri"/>
+              <a:spcAft>
+                <a:spcPts val="1000"/>
+              </a:spcAft>
+              <a:buSzPct val="100000"/>
               <a:buChar char="•"/>
               <a:lnSpc>
                 <a:spcPts val="2200"/>
@@ -9925,10 +9945,12 @@
           </a:bodyPr>
           <a:lstStyle/>
           <a:p>
-            <a:pPr>
-              <a:spcAft>
-                <a:spcPts val="1000"/>
-              </a:spcAft>
+            <a:pPr lvl="0" marL="457200" indent="-228600">
+              <a:buFont typeface="Calibri"/>
+              <a:spcAft>
+                <a:spcPts val="1000"/>
+              </a:spcAft>
+              <a:buSzPct val="100000"/>
               <a:buChar char="•"/>
               <a:lnSpc>
                 <a:spcPts val="2200"/>
@@ -9945,10 +9967,12 @@
             </a:r>
           </a:p>
           <a:p>
-            <a:pPr>
-              <a:spcAft>
-                <a:spcPts val="1000"/>
-              </a:spcAft>
+            <a:pPr lvl="0" marL="457200" indent="-228600">
+              <a:buFont typeface="Calibri"/>
+              <a:spcAft>
+                <a:spcPts val="1000"/>
+              </a:spcAft>
+              <a:buSzPct val="100000"/>
               <a:buChar char="•"/>
               <a:lnSpc>
                 <a:spcPts val="2200"/>
@@ -9965,10 +9989,12 @@
             </a:r>
           </a:p>
           <a:p>
-            <a:pPr>
-              <a:spcAft>
-                <a:spcPts val="1000"/>
-              </a:spcAft>
+            <a:pPr lvl="0" marL="457200" indent="-228600">
+              <a:buFont typeface="Calibri"/>
+              <a:spcAft>
+                <a:spcPts val="1000"/>
+              </a:spcAft>
+              <a:buSzPct val="100000"/>
               <a:buChar char="•"/>
               <a:lnSpc>
                 <a:spcPts val="2200"/>
@@ -9985,10 +10011,12 @@
             </a:r>
           </a:p>
           <a:p>
-            <a:pPr>
-              <a:spcAft>
-                <a:spcPts val="1000"/>
-              </a:spcAft>
+            <a:pPr lvl="0" marL="457200" indent="-228600">
+              <a:buFont typeface="Calibri"/>
+              <a:spcAft>
+                <a:spcPts val="1000"/>
+              </a:spcAft>
+              <a:buSzPct val="100000"/>
               <a:buChar char="•"/>
               <a:lnSpc>
                 <a:spcPts val="2200"/>
@@ -10005,10 +10033,12 @@
             </a:r>
           </a:p>
           <a:p>
-            <a:pPr>
-              <a:spcAft>
-                <a:spcPts val="1000"/>
-              </a:spcAft>
+            <a:pPr lvl="0" marL="457200" indent="-228600">
+              <a:buFont typeface="Calibri"/>
+              <a:spcAft>
+                <a:spcPts val="1000"/>
+              </a:spcAft>
+              <a:buSzPct val="100000"/>
               <a:buChar char="•"/>
               <a:lnSpc>
                 <a:spcPts val="2200"/>
@@ -10025,10 +10055,12 @@
             </a:r>
           </a:p>
           <a:p>
-            <a:pPr>
-              <a:spcAft>
-                <a:spcPts val="1000"/>
-              </a:spcAft>
+            <a:pPr lvl="0" marL="457200" indent="-228600">
+              <a:buFont typeface="Calibri"/>
+              <a:spcAft>
+                <a:spcPts val="1000"/>
+              </a:spcAft>
+              <a:buSzPct val="100000"/>
               <a:buChar char="•"/>
               <a:lnSpc>
                 <a:spcPts val="2200"/>
@@ -10164,10 +10196,12 @@
           </a:bodyPr>
           <a:lstStyle/>
           <a:p>
-            <a:pPr>
-              <a:spcAft>
-                <a:spcPts val="1000"/>
-              </a:spcAft>
+            <a:pPr lvl="0" marL="457200" indent="-228600">
+              <a:buFont typeface="Calibri"/>
+              <a:spcAft>
+                <a:spcPts val="1000"/>
+              </a:spcAft>
+              <a:buSzPct val="100000"/>
               <a:buChar char="•"/>
               <a:lnSpc>
                 <a:spcPts val="2200"/>
@@ -10184,10 +10218,12 @@
             </a:r>
           </a:p>
           <a:p>
-            <a:pPr>
-              <a:spcAft>
-                <a:spcPts val="1000"/>
-              </a:spcAft>
+            <a:pPr lvl="0" marL="457200" indent="-228600">
+              <a:buFont typeface="Calibri"/>
+              <a:spcAft>
+                <a:spcPts val="1000"/>
+              </a:spcAft>
+              <a:buSzPct val="100000"/>
               <a:buChar char="•"/>
               <a:lnSpc>
                 <a:spcPts val="2200"/>
@@ -10204,10 +10240,12 @@
             </a:r>
           </a:p>
           <a:p>
-            <a:pPr>
-              <a:spcAft>
-                <a:spcPts val="1000"/>
-              </a:spcAft>
+            <a:pPr lvl="0" marL="457200" indent="-228600">
+              <a:buFont typeface="Calibri"/>
+              <a:spcAft>
+                <a:spcPts val="1000"/>
+              </a:spcAft>
+              <a:buSzPct val="100000"/>
               <a:buChar char="•"/>
               <a:lnSpc>
                 <a:spcPts val="2200"/>
@@ -10343,10 +10381,12 @@
           </a:bodyPr>
           <a:lstStyle/>
           <a:p>
-            <a:pPr>
-              <a:spcAft>
-                <a:spcPts val="1000"/>
-              </a:spcAft>
+            <a:pPr lvl="0" marL="457200" indent="-228600">
+              <a:buFont typeface="Calibri"/>
+              <a:spcAft>
+                <a:spcPts val="1000"/>
+              </a:spcAft>
+              <a:buSzPct val="100000"/>
               <a:buChar char="•"/>
               <a:lnSpc>
                 <a:spcPts val="2200"/>
@@ -10363,10 +10403,12 @@
             </a:r>
           </a:p>
           <a:p>
-            <a:pPr>
-              <a:spcAft>
-                <a:spcPts val="1000"/>
-              </a:spcAft>
+            <a:pPr lvl="0" marL="457200" indent="-228600">
+              <a:buFont typeface="Calibri"/>
+              <a:spcAft>
+                <a:spcPts val="1000"/>
+              </a:spcAft>
+              <a:buSzPct val="100000"/>
               <a:buChar char="•"/>
               <a:lnSpc>
                 <a:spcPts val="2200"/>
@@ -10383,10 +10425,12 @@
             </a:r>
           </a:p>
           <a:p>
-            <a:pPr>
-              <a:spcAft>
-                <a:spcPts val="1000"/>
-              </a:spcAft>
+            <a:pPr lvl="0" marL="457200" indent="-228600">
+              <a:buFont typeface="Calibri"/>
+              <a:spcAft>
+                <a:spcPts val="1000"/>
+              </a:spcAft>
+              <a:buSzPct val="100000"/>
               <a:buChar char="•"/>
               <a:lnSpc>
                 <a:spcPts val="2200"/>
@@ -10403,10 +10447,12 @@
             </a:r>
           </a:p>
           <a:p>
-            <a:pPr>
-              <a:spcAft>
-                <a:spcPts val="1000"/>
-              </a:spcAft>
+            <a:pPr lvl="0" marL="457200" indent="-228600">
+              <a:buFont typeface="Calibri"/>
+              <a:spcAft>
+                <a:spcPts val="1000"/>
+              </a:spcAft>
+              <a:buSzPct val="100000"/>
               <a:buChar char="•"/>
               <a:lnSpc>
                 <a:spcPts val="2200"/>
@@ -10423,10 +10469,12 @@
             </a:r>
           </a:p>
           <a:p>
-            <a:pPr>
-              <a:spcAft>
-                <a:spcPts val="1000"/>
-              </a:spcAft>
+            <a:pPr lvl="0" marL="457200" indent="-228600">
+              <a:buFont typeface="Calibri"/>
+              <a:spcAft>
+                <a:spcPts val="1000"/>
+              </a:spcAft>
+              <a:buSzPct val="100000"/>
               <a:buChar char="•"/>
               <a:lnSpc>
                 <a:spcPts val="2200"/>
@@ -10443,10 +10491,12 @@
             </a:r>
           </a:p>
           <a:p>
-            <a:pPr>
-              <a:spcAft>
-                <a:spcPts val="1000"/>
-              </a:spcAft>
+            <a:pPr lvl="0" marL="457200" indent="-228600">
+              <a:buFont typeface="Calibri"/>
+              <a:spcAft>
+                <a:spcPts val="1000"/>
+              </a:spcAft>
+              <a:buSzPct val="100000"/>
               <a:buChar char="•"/>
               <a:lnSpc>
                 <a:spcPts val="2200"/>
@@ -10582,10 +10632,12 @@
           </a:bodyPr>
           <a:lstStyle/>
           <a:p>
-            <a:pPr>
-              <a:spcAft>
-                <a:spcPts val="1000"/>
-              </a:spcAft>
+            <a:pPr lvl="0" marL="457200" indent="-228600">
+              <a:buFont typeface="Calibri"/>
+              <a:spcAft>
+                <a:spcPts val="1000"/>
+              </a:spcAft>
+              <a:buSzPct val="100000"/>
               <a:buChar char="•"/>
               <a:lnSpc>
                 <a:spcPts val="2200"/>
@@ -10602,10 +10654,12 @@
             </a:r>
           </a:p>
           <a:p>
-            <a:pPr>
-              <a:spcAft>
-                <a:spcPts val="1000"/>
-              </a:spcAft>
+            <a:pPr lvl="0" marL="457200" indent="-228600">
+              <a:buFont typeface="Calibri"/>
+              <a:spcAft>
+                <a:spcPts val="1000"/>
+              </a:spcAft>
+              <a:buSzPct val="100000"/>
               <a:buChar char="•"/>
               <a:lnSpc>
                 <a:spcPts val="2200"/>
@@ -10622,10 +10676,12 @@
             </a:r>
           </a:p>
           <a:p>
-            <a:pPr>
-              <a:spcAft>
-                <a:spcPts val="1000"/>
-              </a:spcAft>
+            <a:pPr lvl="0" marL="457200" indent="-228600">
+              <a:buFont typeface="Calibri"/>
+              <a:spcAft>
+                <a:spcPts val="1000"/>
+              </a:spcAft>
+              <a:buSzPct val="100000"/>
               <a:buChar char="•"/>
               <a:lnSpc>
                 <a:spcPts val="2200"/>
@@ -10761,10 +10817,12 @@
           </a:bodyPr>
           <a:lstStyle/>
           <a:p>
-            <a:pPr>
-              <a:spcAft>
-                <a:spcPts val="1000"/>
-              </a:spcAft>
+            <a:pPr lvl="0" marL="457200" indent="-228600">
+              <a:buFont typeface="Calibri"/>
+              <a:spcAft>
+                <a:spcPts val="1000"/>
+              </a:spcAft>
+              <a:buSzPct val="100000"/>
               <a:buChar char="•"/>
               <a:lnSpc>
                 <a:spcPts val="2200"/>
@@ -10781,10 +10839,12 @@
             </a:r>
           </a:p>
           <a:p>
-            <a:pPr>
-              <a:spcAft>
-                <a:spcPts val="1000"/>
-              </a:spcAft>
+            <a:pPr lvl="0" marL="457200" indent="-228600">
+              <a:buFont typeface="Calibri"/>
+              <a:spcAft>
+                <a:spcPts val="1000"/>
+              </a:spcAft>
+              <a:buSzPct val="100000"/>
               <a:buChar char="•"/>
               <a:lnSpc>
                 <a:spcPts val="2200"/>
@@ -10801,10 +10861,12 @@
             </a:r>
           </a:p>
           <a:p>
-            <a:pPr>
-              <a:spcAft>
-                <a:spcPts val="1000"/>
-              </a:spcAft>
+            <a:pPr lvl="0" marL="457200" indent="-228600">
+              <a:buFont typeface="Calibri"/>
+              <a:spcAft>
+                <a:spcPts val="1000"/>
+              </a:spcAft>
+              <a:buSzPct val="100000"/>
               <a:buChar char="•"/>
               <a:lnSpc>
                 <a:spcPts val="2200"/>
@@ -10821,10 +10883,12 @@
             </a:r>
           </a:p>
           <a:p>
-            <a:pPr>
-              <a:spcAft>
-                <a:spcPts val="1000"/>
-              </a:spcAft>
+            <a:pPr lvl="0" marL="457200" indent="-228600">
+              <a:buFont typeface="Calibri"/>
+              <a:spcAft>
+                <a:spcPts val="1000"/>
+              </a:spcAft>
+              <a:buSzPct val="100000"/>
               <a:buChar char="•"/>
               <a:lnSpc>
                 <a:spcPts val="2200"/>
@@ -10960,10 +11024,12 @@
           </a:bodyPr>
           <a:lstStyle/>
           <a:p>
-            <a:pPr>
-              <a:spcAft>
-                <a:spcPts val="1000"/>
-              </a:spcAft>
+            <a:pPr lvl="0" marL="457200" indent="-228600">
+              <a:buFont typeface="Calibri"/>
+              <a:spcAft>
+                <a:spcPts val="1000"/>
+              </a:spcAft>
+              <a:buSzPct val="100000"/>
               <a:buChar char="•"/>
               <a:lnSpc>
                 <a:spcPts val="2200"/>
@@ -10980,10 +11046,12 @@
             </a:r>
           </a:p>
           <a:p>
-            <a:pPr>
-              <a:spcAft>
-                <a:spcPts val="1000"/>
-              </a:spcAft>
+            <a:pPr lvl="0" marL="457200" indent="-228600">
+              <a:buFont typeface="Calibri"/>
+              <a:spcAft>
+                <a:spcPts val="1000"/>
+              </a:spcAft>
+              <a:buSzPct val="100000"/>
               <a:buChar char="•"/>
               <a:lnSpc>
                 <a:spcPts val="2200"/>
@@ -11119,10 +11187,12 @@
           </a:bodyPr>
           <a:lstStyle/>
           <a:p>
-            <a:pPr>
-              <a:spcAft>
-                <a:spcPts val="1000"/>
-              </a:spcAft>
+            <a:pPr lvl="0" marL="457200" indent="-228600">
+              <a:buFont typeface="Calibri"/>
+              <a:spcAft>
+                <a:spcPts val="1000"/>
+              </a:spcAft>
+              <a:buSzPct val="100000"/>
               <a:buChar char="•"/>
               <a:lnSpc>
                 <a:spcPts val="2200"/>
@@ -11139,10 +11209,12 @@
             </a:r>
           </a:p>
           <a:p>
-            <a:pPr>
-              <a:spcAft>
-                <a:spcPts val="1000"/>
-              </a:spcAft>
+            <a:pPr lvl="0" marL="457200" indent="-228600">
+              <a:buFont typeface="Calibri"/>
+              <a:spcAft>
+                <a:spcPts val="1000"/>
+              </a:spcAft>
+              <a:buSzPct val="100000"/>
               <a:buChar char="•"/>
               <a:lnSpc>
                 <a:spcPts val="2200"/>
@@ -11159,10 +11231,12 @@
             </a:r>
           </a:p>
           <a:p>
-            <a:pPr>
-              <a:spcAft>
-                <a:spcPts val="1000"/>
-              </a:spcAft>
+            <a:pPr lvl="0" marL="457200" indent="-228600">
+              <a:buFont typeface="Calibri"/>
+              <a:spcAft>
+                <a:spcPts val="1000"/>
+              </a:spcAft>
+              <a:buSzPct val="100000"/>
               <a:buChar char="•"/>
               <a:lnSpc>
                 <a:spcPts val="2200"/>
@@ -11298,10 +11372,12 @@
           </a:bodyPr>
           <a:lstStyle/>
           <a:p>
-            <a:pPr>
-              <a:spcAft>
-                <a:spcPts val="1000"/>
-              </a:spcAft>
+            <a:pPr lvl="0" marL="457200" indent="-228600">
+              <a:buFont typeface="Calibri"/>
+              <a:spcAft>
+                <a:spcPts val="1000"/>
+              </a:spcAft>
+              <a:buSzPct val="100000"/>
               <a:buChar char="•"/>
               <a:lnSpc>
                 <a:spcPts val="2200"/>
@@ -11318,10 +11394,12 @@
             </a:r>
           </a:p>
           <a:p>
-            <a:pPr>
-              <a:spcAft>
-                <a:spcPts val="1000"/>
-              </a:spcAft>
+            <a:pPr lvl="0" marL="457200" indent="-228600">
+              <a:buFont typeface="Calibri"/>
+              <a:spcAft>
+                <a:spcPts val="1000"/>
+              </a:spcAft>
+              <a:buSzPct val="100000"/>
               <a:buChar char="•"/>
               <a:lnSpc>
                 <a:spcPts val="2200"/>
@@ -11457,10 +11535,12 @@
           </a:bodyPr>
           <a:lstStyle/>
           <a:p>
-            <a:pPr>
-              <a:spcAft>
-                <a:spcPts val="1000"/>
-              </a:spcAft>
+            <a:pPr lvl="0" marL="457200" indent="-228600">
+              <a:buFont typeface="Calibri"/>
+              <a:spcAft>
+                <a:spcPts val="1000"/>
+              </a:spcAft>
+              <a:buSzPct val="100000"/>
               <a:buChar char="•"/>
               <a:lnSpc>
                 <a:spcPts val="2200"/>
@@ -11477,10 +11557,12 @@
             </a:r>
           </a:p>
           <a:p>
-            <a:pPr>
-              <a:spcAft>
-                <a:spcPts val="1000"/>
-              </a:spcAft>
+            <a:pPr lvl="0" marL="457200" indent="-228600">
+              <a:buFont typeface="Calibri"/>
+              <a:spcAft>
+                <a:spcPts val="1000"/>
+              </a:spcAft>
+              <a:buSzPct val="100000"/>
               <a:buChar char="•"/>
               <a:lnSpc>
                 <a:spcPts val="2200"/>
@@ -11497,10 +11579,12 @@
             </a:r>
           </a:p>
           <a:p>
-            <a:pPr>
-              <a:spcAft>
-                <a:spcPts val="1000"/>
-              </a:spcAft>
+            <a:pPr lvl="0" marL="457200" indent="-228600">
+              <a:buFont typeface="Calibri"/>
+              <a:spcAft>
+                <a:spcPts val="1000"/>
+              </a:spcAft>
+              <a:buSzPct val="100000"/>
               <a:buChar char="•"/>
               <a:lnSpc>
                 <a:spcPts val="2200"/>
@@ -11517,10 +11601,12 @@
             </a:r>
           </a:p>
           <a:p>
-            <a:pPr>
-              <a:spcAft>
-                <a:spcPts val="1000"/>
-              </a:spcAft>
+            <a:pPr lvl="0" marL="457200" indent="-228600">
+              <a:buFont typeface="Calibri"/>
+              <a:spcAft>
+                <a:spcPts val="1000"/>
+              </a:spcAft>
+              <a:buSzPct val="100000"/>
               <a:buChar char="•"/>
               <a:lnSpc>
                 <a:spcPts val="2200"/>
@@ -11537,10 +11623,12 @@
             </a:r>
           </a:p>
           <a:p>
-            <a:pPr>
-              <a:spcAft>
-                <a:spcPts val="1000"/>
-              </a:spcAft>
+            <a:pPr lvl="0" marL="457200" indent="-228600">
+              <a:buFont typeface="Calibri"/>
+              <a:spcAft>
+                <a:spcPts val="1000"/>
+              </a:spcAft>
+              <a:buSzPct val="100000"/>
               <a:buChar char="•"/>
               <a:lnSpc>
                 <a:spcPts val="2200"/>
@@ -11557,10 +11645,12 @@
             </a:r>
           </a:p>
           <a:p>
-            <a:pPr>
-              <a:spcAft>
-                <a:spcPts val="1000"/>
-              </a:spcAft>
+            <a:pPr lvl="0" marL="457200" indent="-228600">
+              <a:buFont typeface="Calibri"/>
+              <a:spcAft>
+                <a:spcPts val="1000"/>
+              </a:spcAft>
+              <a:buSzPct val="100000"/>
               <a:buChar char="•"/>
               <a:lnSpc>
                 <a:spcPts val="2200"/>
@@ -11696,10 +11786,12 @@
           </a:bodyPr>
           <a:lstStyle/>
           <a:p>
-            <a:pPr>
-              <a:spcAft>
-                <a:spcPts val="1000"/>
-              </a:spcAft>
+            <a:pPr lvl="0" marL="457200" indent="-228600">
+              <a:buFont typeface="Calibri"/>
+              <a:spcAft>
+                <a:spcPts val="1000"/>
+              </a:spcAft>
+              <a:buSzPct val="100000"/>
               <a:buChar char="•"/>
               <a:lnSpc>
                 <a:spcPts val="2200"/>
@@ -11716,10 +11808,12 @@
             </a:r>
           </a:p>
           <a:p>
-            <a:pPr>
-              <a:spcAft>
-                <a:spcPts val="1000"/>
-              </a:spcAft>
+            <a:pPr lvl="0" marL="457200" indent="-228600">
+              <a:buFont typeface="Calibri"/>
+              <a:spcAft>
+                <a:spcPts val="1000"/>
+              </a:spcAft>
+              <a:buSzPct val="100000"/>
               <a:buChar char="•"/>
               <a:lnSpc>
                 <a:spcPts val="2200"/>
@@ -11736,10 +11830,12 @@
             </a:r>
           </a:p>
           <a:p>
-            <a:pPr>
-              <a:spcAft>
-                <a:spcPts val="1000"/>
-              </a:spcAft>
+            <a:pPr lvl="0" marL="457200" indent="-228600">
+              <a:buFont typeface="Calibri"/>
+              <a:spcAft>
+                <a:spcPts val="1000"/>
+              </a:spcAft>
+              <a:buSzPct val="100000"/>
               <a:buChar char="•"/>
               <a:lnSpc>
                 <a:spcPts val="2200"/>
@@ -11756,10 +11852,12 @@
             </a:r>
           </a:p>
           <a:p>
-            <a:pPr>
-              <a:spcAft>
-                <a:spcPts val="1000"/>
-              </a:spcAft>
+            <a:pPr lvl="0" marL="457200" indent="-228600">
+              <a:buFont typeface="Calibri"/>
+              <a:spcAft>
+                <a:spcPts val="1000"/>
+              </a:spcAft>
+              <a:buSzPct val="100000"/>
               <a:buChar char="•"/>
               <a:lnSpc>
                 <a:spcPts val="2200"/>
@@ -11895,10 +11993,12 @@
           </a:bodyPr>
           <a:lstStyle/>
           <a:p>
-            <a:pPr>
-              <a:spcAft>
-                <a:spcPts val="1000"/>
-              </a:spcAft>
+            <a:pPr lvl="0" marL="457200" indent="-228600">
+              <a:buFont typeface="Calibri"/>
+              <a:spcAft>
+                <a:spcPts val="1000"/>
+              </a:spcAft>
+              <a:buSzPct val="100000"/>
               <a:buChar char="•"/>
               <a:lnSpc>
                 <a:spcPts val="2200"/>
@@ -11915,10 +12015,12 @@
             </a:r>
           </a:p>
           <a:p>
-            <a:pPr>
-              <a:spcAft>
-                <a:spcPts val="1000"/>
-              </a:spcAft>
+            <a:pPr lvl="0" marL="457200" indent="-228600">
+              <a:buFont typeface="Calibri"/>
+              <a:spcAft>
+                <a:spcPts val="1000"/>
+              </a:spcAft>
+              <a:buSzPct val="100000"/>
               <a:buChar char="•"/>
               <a:lnSpc>
                 <a:spcPts val="2200"/>
@@ -11935,10 +12037,12 @@
             </a:r>
           </a:p>
           <a:p>
-            <a:pPr>
-              <a:spcAft>
-                <a:spcPts val="1000"/>
-              </a:spcAft>
+            <a:pPr lvl="0" marL="457200" indent="-228600">
+              <a:buFont typeface="Calibri"/>
+              <a:spcAft>
+                <a:spcPts val="1000"/>
+              </a:spcAft>
+              <a:buSzPct val="100000"/>
               <a:buChar char="•"/>
               <a:lnSpc>
                 <a:spcPts val="2200"/>
@@ -11955,10 +12059,12 @@
             </a:r>
           </a:p>
           <a:p>
-            <a:pPr>
-              <a:spcAft>
-                <a:spcPts val="1000"/>
-              </a:spcAft>
+            <a:pPr lvl="0" marL="457200" indent="-228600">
+              <a:buFont typeface="Calibri"/>
+              <a:spcAft>
+                <a:spcPts val="1000"/>
+              </a:spcAft>
+              <a:buSzPct val="100000"/>
               <a:buChar char="•"/>
               <a:lnSpc>
                 <a:spcPts val="2200"/>
@@ -11975,10 +12081,12 @@
             </a:r>
           </a:p>
           <a:p>
-            <a:pPr>
-              <a:spcAft>
-                <a:spcPts val="1000"/>
-              </a:spcAft>
+            <a:pPr lvl="0" marL="457200" indent="-228600">
+              <a:buFont typeface="Calibri"/>
+              <a:spcAft>
+                <a:spcPts val="1000"/>
+              </a:spcAft>
+              <a:buSzPct val="100000"/>
               <a:buChar char="•"/>
               <a:lnSpc>
                 <a:spcPts val="2200"/>
@@ -11995,10 +12103,12 @@
             </a:r>
           </a:p>
           <a:p>
-            <a:pPr>
-              <a:spcAft>
-                <a:spcPts val="1000"/>
-              </a:spcAft>
+            <a:pPr lvl="0" marL="457200" indent="-228600">
+              <a:buFont typeface="Calibri"/>
+              <a:spcAft>
+                <a:spcPts val="1000"/>
+              </a:spcAft>
+              <a:buSzPct val="100000"/>
               <a:buChar char="•"/>
               <a:lnSpc>
                 <a:spcPts val="2200"/>
@@ -12134,10 +12244,12 @@
           </a:bodyPr>
           <a:lstStyle/>
           <a:p>
-            <a:pPr>
-              <a:spcAft>
-                <a:spcPts val="1000"/>
-              </a:spcAft>
+            <a:pPr lvl="0" marL="457200" indent="-228600">
+              <a:buFont typeface="Calibri"/>
+              <a:spcAft>
+                <a:spcPts val="1000"/>
+              </a:spcAft>
+              <a:buSzPct val="100000"/>
               <a:buChar char="•"/>
               <a:lnSpc>
                 <a:spcPts val="2200"/>
@@ -12154,10 +12266,12 @@
             </a:r>
           </a:p>
           <a:p>
-            <a:pPr>
-              <a:spcAft>
-                <a:spcPts val="1000"/>
-              </a:spcAft>
+            <a:pPr lvl="0" marL="457200" indent="-228600">
+              <a:buFont typeface="Calibri"/>
+              <a:spcAft>
+                <a:spcPts val="1000"/>
+              </a:spcAft>
+              <a:buSzPct val="100000"/>
               <a:buChar char="•"/>
               <a:lnSpc>
                 <a:spcPts val="2200"/>
@@ -12174,10 +12288,12 @@
             </a:r>
           </a:p>
           <a:p>
-            <a:pPr>
-              <a:spcAft>
-                <a:spcPts val="1000"/>
-              </a:spcAft>
+            <a:pPr lvl="0" marL="457200" indent="-228600">
+              <a:buFont typeface="Calibri"/>
+              <a:spcAft>
+                <a:spcPts val="1000"/>
+              </a:spcAft>
+              <a:buSzPct val="100000"/>
               <a:buChar char="•"/>
               <a:lnSpc>
                 <a:spcPts val="2200"/>
@@ -12194,10 +12310,12 @@
             </a:r>
           </a:p>
           <a:p>
-            <a:pPr>
-              <a:spcAft>
-                <a:spcPts val="1000"/>
-              </a:spcAft>
+            <a:pPr lvl="0" marL="457200" indent="-228600">
+              <a:buFont typeface="Calibri"/>
+              <a:spcAft>
+                <a:spcPts val="1000"/>
+              </a:spcAft>
+              <a:buSzPct val="100000"/>
               <a:buChar char="•"/>
               <a:lnSpc>
                 <a:spcPts val="2200"/>
@@ -12333,10 +12451,12 @@
           </a:bodyPr>
           <a:lstStyle/>
           <a:p>
-            <a:pPr>
-              <a:spcAft>
-                <a:spcPts val="1000"/>
-              </a:spcAft>
+            <a:pPr lvl="0" marL="457200" indent="-228600">
+              <a:buFont typeface="Calibri"/>
+              <a:spcAft>
+                <a:spcPts val="1000"/>
+              </a:spcAft>
+              <a:buSzPct val="100000"/>
               <a:buChar char="•"/>
               <a:lnSpc>
                 <a:spcPts val="2200"/>
@@ -12353,10 +12473,12 @@
             </a:r>
           </a:p>
           <a:p>
-            <a:pPr>
-              <a:spcAft>
-                <a:spcPts val="1000"/>
-              </a:spcAft>
+            <a:pPr lvl="0" marL="457200" indent="-228600">
+              <a:buFont typeface="Calibri"/>
+              <a:spcAft>
+                <a:spcPts val="1000"/>
+              </a:spcAft>
+              <a:buSzPct val="100000"/>
               <a:buChar char="•"/>
               <a:lnSpc>
                 <a:spcPts val="2200"/>
@@ -12373,10 +12495,12 @@
             </a:r>
           </a:p>
           <a:p>
-            <a:pPr>
-              <a:spcAft>
-                <a:spcPts val="1000"/>
-              </a:spcAft>
+            <a:pPr lvl="0" marL="457200" indent="-228600">
+              <a:buFont typeface="Calibri"/>
+              <a:spcAft>
+                <a:spcPts val="1000"/>
+              </a:spcAft>
+              <a:buSzPct val="100000"/>
               <a:buChar char="•"/>
               <a:lnSpc>
                 <a:spcPts val="2200"/>
@@ -12393,10 +12517,12 @@
             </a:r>
           </a:p>
           <a:p>
-            <a:pPr>
-              <a:spcAft>
-                <a:spcPts val="1000"/>
-              </a:spcAft>
+            <a:pPr lvl="0" marL="457200" indent="-228600">
+              <a:buFont typeface="Calibri"/>
+              <a:spcAft>
+                <a:spcPts val="1000"/>
+              </a:spcAft>
+              <a:buSzPct val="100000"/>
               <a:buChar char="•"/>
               <a:lnSpc>
                 <a:spcPts val="2200"/>
@@ -12532,10 +12658,12 @@
           </a:bodyPr>
           <a:lstStyle/>
           <a:p>
-            <a:pPr>
-              <a:spcAft>
-                <a:spcPts val="1000"/>
-              </a:spcAft>
+            <a:pPr lvl="0" marL="457200" indent="-228600">
+              <a:buFont typeface="Calibri"/>
+              <a:spcAft>
+                <a:spcPts val="1000"/>
+              </a:spcAft>
+              <a:buSzPct val="100000"/>
               <a:buChar char="•"/>
               <a:lnSpc>
                 <a:spcPts val="2200"/>
@@ -12552,10 +12680,12 @@
             </a:r>
           </a:p>
           <a:p>
-            <a:pPr>
-              <a:spcAft>
-                <a:spcPts val="1000"/>
-              </a:spcAft>
+            <a:pPr lvl="0" marL="457200" indent="-228600">
+              <a:buFont typeface="Calibri"/>
+              <a:spcAft>
+                <a:spcPts val="1000"/>
+              </a:spcAft>
+              <a:buSzPct val="100000"/>
               <a:buChar char="•"/>
               <a:lnSpc>
                 <a:spcPts val="2200"/>
@@ -12572,10 +12702,12 @@
             </a:r>
           </a:p>
           <a:p>
-            <a:pPr>
-              <a:spcAft>
-                <a:spcPts val="1000"/>
-              </a:spcAft>
+            <a:pPr lvl="0" marL="457200" indent="-228600">
+              <a:buFont typeface="Calibri"/>
+              <a:spcAft>
+                <a:spcPts val="1000"/>
+              </a:spcAft>
+              <a:buSzPct val="100000"/>
               <a:buChar char="•"/>
               <a:lnSpc>
                 <a:spcPts val="2200"/>
@@ -12592,10 +12724,12 @@
             </a:r>
           </a:p>
           <a:p>
-            <a:pPr>
-              <a:spcAft>
-                <a:spcPts val="1000"/>
-              </a:spcAft>
+            <a:pPr lvl="0" marL="457200" indent="-228600">
+              <a:buFont typeface="Calibri"/>
+              <a:spcAft>
+                <a:spcPts val="1000"/>
+              </a:spcAft>
+              <a:buSzPct val="100000"/>
               <a:buChar char="•"/>
               <a:lnSpc>
                 <a:spcPts val="2200"/>
@@ -12612,10 +12746,12 @@
             </a:r>
           </a:p>
           <a:p>
-            <a:pPr>
-              <a:spcAft>
-                <a:spcPts val="1000"/>
-              </a:spcAft>
+            <a:pPr lvl="0" marL="457200" indent="-228600">
+              <a:buFont typeface="Calibri"/>
+              <a:spcAft>
+                <a:spcPts val="1000"/>
+              </a:spcAft>
+              <a:buSzPct val="100000"/>
               <a:buChar char="•"/>
               <a:lnSpc>
                 <a:spcPts val="2200"/>
@@ -12632,10 +12768,12 @@
             </a:r>
           </a:p>
           <a:p>
-            <a:pPr>
-              <a:spcAft>
-                <a:spcPts val="1000"/>
-              </a:spcAft>
+            <a:pPr lvl="0" marL="457200" indent="-228600">
+              <a:buFont typeface="Calibri"/>
+              <a:spcAft>
+                <a:spcPts val="1000"/>
+              </a:spcAft>
+              <a:buSzPct val="100000"/>
               <a:buChar char="•"/>
               <a:lnSpc>
                 <a:spcPts val="2200"/>
@@ -12771,10 +12909,12 @@
           </a:bodyPr>
           <a:lstStyle/>
           <a:p>
-            <a:pPr>
-              <a:spcAft>
-                <a:spcPts val="1000"/>
-              </a:spcAft>
+            <a:pPr lvl="0" marL="457200" indent="-228600">
+              <a:buFont typeface="Calibri"/>
+              <a:spcAft>
+                <a:spcPts val="1000"/>
+              </a:spcAft>
+              <a:buSzPct val="100000"/>
               <a:buChar char="•"/>
               <a:lnSpc>
                 <a:spcPts val="2200"/>
@@ -12791,10 +12931,12 @@
             </a:r>
           </a:p>
           <a:p>
-            <a:pPr>
-              <a:spcAft>
-                <a:spcPts val="1000"/>
-              </a:spcAft>
+            <a:pPr lvl="0" marL="457200" indent="-228600">
+              <a:buFont typeface="Calibri"/>
+              <a:spcAft>
+                <a:spcPts val="1000"/>
+              </a:spcAft>
+              <a:buSzPct val="100000"/>
               <a:buChar char="•"/>
               <a:lnSpc>
                 <a:spcPts val="2200"/>
@@ -12811,10 +12953,12 @@
             </a:r>
           </a:p>
           <a:p>
-            <a:pPr>
-              <a:spcAft>
-                <a:spcPts val="1000"/>
-              </a:spcAft>
+            <a:pPr lvl="0" marL="457200" indent="-228600">
+              <a:buFont typeface="Calibri"/>
+              <a:spcAft>
+                <a:spcPts val="1000"/>
+              </a:spcAft>
+              <a:buSzPct val="100000"/>
               <a:buChar char="•"/>
               <a:lnSpc>
                 <a:spcPts val="2200"/>
@@ -12950,10 +13094,12 @@
           </a:bodyPr>
           <a:lstStyle/>
           <a:p>
-            <a:pPr>
-              <a:spcAft>
-                <a:spcPts val="1000"/>
-              </a:spcAft>
+            <a:pPr lvl="0" marL="457200" indent="-228600">
+              <a:buFont typeface="Calibri"/>
+              <a:spcAft>
+                <a:spcPts val="1000"/>
+              </a:spcAft>
+              <a:buSzPct val="100000"/>
               <a:buChar char="•"/>
               <a:lnSpc>
                 <a:spcPts val="2200"/>
@@ -12970,10 +13116,12 @@
             </a:r>
           </a:p>
           <a:p>
-            <a:pPr>
-              <a:spcAft>
-                <a:spcPts val="1000"/>
-              </a:spcAft>
+            <a:pPr lvl="0" marL="457200" indent="-228600">
+              <a:buFont typeface="Calibri"/>
+              <a:spcAft>
+                <a:spcPts val="1000"/>
+              </a:spcAft>
+              <a:buSzPct val="100000"/>
               <a:buChar char="•"/>
               <a:lnSpc>
                 <a:spcPts val="2200"/>
@@ -13109,10 +13257,12 @@
           </a:bodyPr>
           <a:lstStyle/>
           <a:p>
-            <a:pPr>
-              <a:spcAft>
-                <a:spcPts val="1000"/>
-              </a:spcAft>
+            <a:pPr lvl="0" marL="457200" indent="-228600">
+              <a:buFont typeface="Calibri"/>
+              <a:spcAft>
+                <a:spcPts val="1000"/>
+              </a:spcAft>
+              <a:buSzPct val="100000"/>
               <a:buChar char="•"/>
               <a:lnSpc>
                 <a:spcPts val="2200"/>
@@ -13129,10 +13279,12 @@
             </a:r>
           </a:p>
           <a:p>
-            <a:pPr>
-              <a:spcAft>
-                <a:spcPts val="1000"/>
-              </a:spcAft>
+            <a:pPr lvl="0" marL="457200" indent="-228600">
+              <a:buFont typeface="Calibri"/>
+              <a:spcAft>
+                <a:spcPts val="1000"/>
+              </a:spcAft>
+              <a:buSzPct val="100000"/>
               <a:buChar char="•"/>
               <a:lnSpc>
                 <a:spcPts val="2200"/>
@@ -13268,10 +13420,12 @@
           </a:bodyPr>
           <a:lstStyle/>
           <a:p>
-            <a:pPr>
-              <a:spcAft>
-                <a:spcPts val="1000"/>
-              </a:spcAft>
+            <a:pPr lvl="0" marL="457200" indent="-228600">
+              <a:buFont typeface="Calibri"/>
+              <a:spcAft>
+                <a:spcPts val="1000"/>
+              </a:spcAft>
+              <a:buSzPct val="100000"/>
               <a:buChar char="•"/>
               <a:lnSpc>
                 <a:spcPts val="2200"/>
@@ -13288,10 +13442,12 @@
             </a:r>
           </a:p>
           <a:p>
-            <a:pPr>
-              <a:spcAft>
-                <a:spcPts val="1000"/>
-              </a:spcAft>
+            <a:pPr lvl="0" marL="457200" indent="-228600">
+              <a:buFont typeface="Calibri"/>
+              <a:spcAft>
+                <a:spcPts val="1000"/>
+              </a:spcAft>
+              <a:buSzPct val="100000"/>
               <a:buChar char="•"/>
               <a:lnSpc>
                 <a:spcPts val="2200"/>
@@ -13308,10 +13464,12 @@
             </a:r>
           </a:p>
           <a:p>
-            <a:pPr>
-              <a:spcAft>
-                <a:spcPts val="1000"/>
-              </a:spcAft>
+            <a:pPr lvl="0" marL="457200" indent="-228600">
+              <a:buFont typeface="Calibri"/>
+              <a:spcAft>
+                <a:spcPts val="1000"/>
+              </a:spcAft>
+              <a:buSzPct val="100000"/>
               <a:buChar char="•"/>
               <a:lnSpc>
                 <a:spcPts val="2200"/>
@@ -13447,10 +13605,12 @@
           </a:bodyPr>
           <a:lstStyle/>
           <a:p>
-            <a:pPr>
-              <a:spcAft>
-                <a:spcPts val="1000"/>
-              </a:spcAft>
+            <a:pPr lvl="0" marL="457200" indent="-228600">
+              <a:buFont typeface="Calibri"/>
+              <a:spcAft>
+                <a:spcPts val="1000"/>
+              </a:spcAft>
+              <a:buSzPct val="100000"/>
               <a:buChar char="•"/>
               <a:lnSpc>
                 <a:spcPts val="2200"/>
@@ -13467,10 +13627,12 @@
             </a:r>
           </a:p>
           <a:p>
-            <a:pPr>
-              <a:spcAft>
-                <a:spcPts val="1000"/>
-              </a:spcAft>
+            <a:pPr lvl="0" marL="457200" indent="-228600">
+              <a:buFont typeface="Calibri"/>
+              <a:spcAft>
+                <a:spcPts val="1000"/>
+              </a:spcAft>
+              <a:buSzPct val="100000"/>
               <a:buChar char="•"/>
               <a:lnSpc>
                 <a:spcPts val="2200"/>
@@ -13606,10 +13768,12 @@
           </a:bodyPr>
           <a:lstStyle/>
           <a:p>
-            <a:pPr>
-              <a:spcAft>
-                <a:spcPts val="1000"/>
-              </a:spcAft>
+            <a:pPr lvl="0" marL="457200" indent="-228600">
+              <a:buFont typeface="Calibri"/>
+              <a:spcAft>
+                <a:spcPts val="1000"/>
+              </a:spcAft>
+              <a:buSzPct val="100000"/>
               <a:buChar char="•"/>
               <a:lnSpc>
                 <a:spcPts val="2200"/>
@@ -13626,10 +13790,12 @@
             </a:r>
           </a:p>
           <a:p>
-            <a:pPr>
-              <a:spcAft>
-                <a:spcPts val="1000"/>
-              </a:spcAft>
+            <a:pPr lvl="0" marL="457200" indent="-228600">
+              <a:buFont typeface="Calibri"/>
+              <a:spcAft>
+                <a:spcPts val="1000"/>
+              </a:spcAft>
+              <a:buSzPct val="100000"/>
               <a:buChar char="•"/>
               <a:lnSpc>
                 <a:spcPts val="2200"/>
@@ -13646,10 +13812,12 @@
             </a:r>
           </a:p>
           <a:p>
-            <a:pPr>
-              <a:spcAft>
-                <a:spcPts val="1000"/>
-              </a:spcAft>
+            <a:pPr lvl="0" marL="457200" indent="-228600">
+              <a:buFont typeface="Calibri"/>
+              <a:spcAft>
+                <a:spcPts val="1000"/>
+              </a:spcAft>
+              <a:buSzPct val="100000"/>
               <a:buChar char="•"/>
               <a:lnSpc>
                 <a:spcPts val="2200"/>
@@ -13785,10 +13953,12 @@
           </a:bodyPr>
           <a:lstStyle/>
           <a:p>
-            <a:pPr>
-              <a:spcAft>
-                <a:spcPts val="1000"/>
-              </a:spcAft>
+            <a:pPr lvl="0" marL="457200" indent="-228600">
+              <a:buFont typeface="Calibri"/>
+              <a:spcAft>
+                <a:spcPts val="1000"/>
+              </a:spcAft>
+              <a:buSzPct val="100000"/>
               <a:buChar char="•"/>
               <a:lnSpc>
                 <a:spcPts val="2200"/>
@@ -13805,10 +13975,12 @@
             </a:r>
           </a:p>
           <a:p>
-            <a:pPr>
-              <a:spcAft>
-                <a:spcPts val="1000"/>
-              </a:spcAft>
+            <a:pPr lvl="0" marL="457200" indent="-228600">
+              <a:buFont typeface="Calibri"/>
+              <a:spcAft>
+                <a:spcPts val="1000"/>
+              </a:spcAft>
+              <a:buSzPct val="100000"/>
               <a:buChar char="•"/>
               <a:lnSpc>
                 <a:spcPts val="2200"/>
@@ -13825,10 +13997,12 @@
             </a:r>
           </a:p>
           <a:p>
-            <a:pPr>
-              <a:spcAft>
-                <a:spcPts val="1000"/>
-              </a:spcAft>
+            <a:pPr lvl="0" marL="457200" indent="-228600">
+              <a:buFont typeface="Calibri"/>
+              <a:spcAft>
+                <a:spcPts val="1000"/>
+              </a:spcAft>
+              <a:buSzPct val="100000"/>
               <a:buChar char="•"/>
               <a:lnSpc>
                 <a:spcPts val="2200"/>
@@ -13845,10 +14019,12 @@
             </a:r>
           </a:p>
           <a:p>
-            <a:pPr>
-              <a:spcAft>
-                <a:spcPts val="1000"/>
-              </a:spcAft>
+            <a:pPr lvl="0" marL="457200" indent="-228600">
+              <a:buFont typeface="Calibri"/>
+              <a:spcAft>
+                <a:spcPts val="1000"/>
+              </a:spcAft>
+              <a:buSzPct val="100000"/>
               <a:buChar char="•"/>
               <a:lnSpc>
                 <a:spcPts val="2200"/>
@@ -13865,10 +14041,12 @@
             </a:r>
           </a:p>
           <a:p>
-            <a:pPr>
-              <a:spcAft>
-                <a:spcPts val="1000"/>
-              </a:spcAft>
+            <a:pPr lvl="0" marL="457200" indent="-228600">
+              <a:buFont typeface="Calibri"/>
+              <a:spcAft>
+                <a:spcPts val="1000"/>
+              </a:spcAft>
+              <a:buSzPct val="100000"/>
               <a:buChar char="•"/>
               <a:lnSpc>
                 <a:spcPts val="2200"/>
@@ -14315,10 +14493,12 @@
           </a:bodyPr>
           <a:lstStyle/>
           <a:p>
-            <a:pPr>
-              <a:spcAft>
-                <a:spcPts val="1000"/>
-              </a:spcAft>
+            <a:pPr lvl="0" marL="457200" indent="-228600">
+              <a:buFont typeface="Calibri"/>
+              <a:spcAft>
+                <a:spcPts val="1000"/>
+              </a:spcAft>
+              <a:buSzPct val="100000"/>
               <a:buChar char="•"/>
               <a:lnSpc>
                 <a:spcPts val="2200"/>
@@ -14335,10 +14515,12 @@
             </a:r>
           </a:p>
           <a:p>
-            <a:pPr>
-              <a:spcAft>
-                <a:spcPts val="1000"/>
-              </a:spcAft>
+            <a:pPr lvl="0" marL="457200" indent="-228600">
+              <a:buFont typeface="Calibri"/>
+              <a:spcAft>
+                <a:spcPts val="1000"/>
+              </a:spcAft>
+              <a:buSzPct val="100000"/>
               <a:buChar char="•"/>
               <a:lnSpc>
                 <a:spcPts val="2200"/>
@@ -14355,10 +14537,12 @@
             </a:r>
           </a:p>
           <a:p>
-            <a:pPr>
-              <a:spcAft>
-                <a:spcPts val="1000"/>
-              </a:spcAft>
+            <a:pPr lvl="0" marL="457200" indent="-228600">
+              <a:buFont typeface="Calibri"/>
+              <a:spcAft>
+                <a:spcPts val="1000"/>
+              </a:spcAft>
+              <a:buSzPct val="100000"/>
               <a:buChar char="•"/>
               <a:lnSpc>
                 <a:spcPts val="2200"/>
@@ -14375,10 +14559,12 @@
             </a:r>
           </a:p>
           <a:p>
-            <a:pPr>
-              <a:spcAft>
-                <a:spcPts val="1000"/>
-              </a:spcAft>
+            <a:pPr lvl="0" marL="457200" indent="-228600">
+              <a:buFont typeface="Calibri"/>
+              <a:spcAft>
+                <a:spcPts val="1000"/>
+              </a:spcAft>
+              <a:buSzPct val="100000"/>
               <a:buChar char="•"/>
               <a:lnSpc>
                 <a:spcPts val="2200"/>
@@ -14514,10 +14700,12 @@
           </a:bodyPr>
           <a:lstStyle/>
           <a:p>
-            <a:pPr>
-              <a:spcAft>
-                <a:spcPts val="1000"/>
-              </a:spcAft>
+            <a:pPr lvl="0" marL="457200" indent="-228600">
+              <a:buFont typeface="Calibri"/>
+              <a:spcAft>
+                <a:spcPts val="1000"/>
+              </a:spcAft>
+              <a:buSzPct val="100000"/>
               <a:buChar char="•"/>
               <a:lnSpc>
                 <a:spcPts val="2200"/>
@@ -14534,10 +14722,12 @@
             </a:r>
           </a:p>
           <a:p>
-            <a:pPr>
-              <a:spcAft>
-                <a:spcPts val="1000"/>
-              </a:spcAft>
+            <a:pPr lvl="0" marL="457200" indent="-228600">
+              <a:buFont typeface="Calibri"/>
+              <a:spcAft>
+                <a:spcPts val="1000"/>
+              </a:spcAft>
+              <a:buSzPct val="100000"/>
               <a:buChar char="•"/>
               <a:lnSpc>
                 <a:spcPts val="2200"/>
@@ -14554,10 +14744,12 @@
             </a:r>
           </a:p>
           <a:p>
-            <a:pPr>
-              <a:spcAft>
-                <a:spcPts val="1000"/>
-              </a:spcAft>
+            <a:pPr lvl="0" marL="457200" indent="-228600">
+              <a:buFont typeface="Calibri"/>
+              <a:spcAft>
+                <a:spcPts val="1000"/>
+              </a:spcAft>
+              <a:buSzPct val="100000"/>
               <a:buChar char="•"/>
               <a:lnSpc>
                 <a:spcPts val="2200"/>
@@ -14693,10 +14885,12 @@
           </a:bodyPr>
           <a:lstStyle/>
           <a:p>
-            <a:pPr>
-              <a:spcAft>
-                <a:spcPts val="1000"/>
-              </a:spcAft>
+            <a:pPr lvl="0" marL="457200" indent="-228600">
+              <a:buFont typeface="Calibri"/>
+              <a:spcAft>
+                <a:spcPts val="1000"/>
+              </a:spcAft>
+              <a:buSzPct val="100000"/>
               <a:buChar char="•"/>
               <a:lnSpc>
                 <a:spcPts val="2200"/>
@@ -14713,10 +14907,12 @@
             </a:r>
           </a:p>
           <a:p>
-            <a:pPr>
-              <a:spcAft>
-                <a:spcPts val="1000"/>
-              </a:spcAft>
+            <a:pPr lvl="0" marL="457200" indent="-228600">
+              <a:buFont typeface="Calibri"/>
+              <a:spcAft>
+                <a:spcPts val="1000"/>
+              </a:spcAft>
+              <a:buSzPct val="100000"/>
               <a:buChar char="•"/>
               <a:lnSpc>
                 <a:spcPts val="2200"/>
@@ -14733,10 +14929,12 @@
             </a:r>
           </a:p>
           <a:p>
-            <a:pPr>
-              <a:spcAft>
-                <a:spcPts val="1000"/>
-              </a:spcAft>
+            <a:pPr lvl="0" marL="457200" indent="-228600">
+              <a:buFont typeface="Calibri"/>
+              <a:spcAft>
+                <a:spcPts val="1000"/>
+              </a:spcAft>
+              <a:buSzPct val="100000"/>
               <a:buChar char="•"/>
               <a:lnSpc>
                 <a:spcPts val="2200"/>
@@ -14872,10 +15070,12 @@
           </a:bodyPr>
           <a:lstStyle/>
           <a:p>
-            <a:pPr>
-              <a:spcAft>
-                <a:spcPts val="1000"/>
-              </a:spcAft>
+            <a:pPr lvl="0" marL="457200" indent="-228600">
+              <a:buFont typeface="Calibri"/>
+              <a:spcAft>
+                <a:spcPts val="1000"/>
+              </a:spcAft>
+              <a:buSzPct val="100000"/>
               <a:buChar char="•"/>
               <a:lnSpc>
                 <a:spcPts val="2200"/>
@@ -14892,10 +15092,12 @@
             </a:r>
           </a:p>
           <a:p>
-            <a:pPr>
-              <a:spcAft>
-                <a:spcPts val="1000"/>
-              </a:spcAft>
+            <a:pPr lvl="0" marL="457200" indent="-228600">
+              <a:buFont typeface="Calibri"/>
+              <a:spcAft>
+                <a:spcPts val="1000"/>
+              </a:spcAft>
+              <a:buSzPct val="100000"/>
               <a:buChar char="•"/>
               <a:lnSpc>
                 <a:spcPts val="2200"/>
@@ -15031,10 +15233,12 @@
           </a:bodyPr>
           <a:lstStyle/>
           <a:p>
-            <a:pPr>
-              <a:spcAft>
-                <a:spcPts val="1000"/>
-              </a:spcAft>
+            <a:pPr lvl="0" marL="457200" indent="-228600">
+              <a:buFont typeface="Calibri"/>
+              <a:spcAft>
+                <a:spcPts val="1000"/>
+              </a:spcAft>
+              <a:buSzPct val="100000"/>
               <a:buChar char="•"/>
               <a:lnSpc>
                 <a:spcPts val="2200"/>
@@ -15051,10 +15255,12 @@
             </a:r>
           </a:p>
           <a:p>
-            <a:pPr>
-              <a:spcAft>
-                <a:spcPts val="1000"/>
-              </a:spcAft>
+            <a:pPr lvl="0" marL="457200" indent="-228600">
+              <a:buFont typeface="Calibri"/>
+              <a:spcAft>
+                <a:spcPts val="1000"/>
+              </a:spcAft>
+              <a:buSzPct val="100000"/>
               <a:buChar char="•"/>
               <a:lnSpc>
                 <a:spcPts val="2200"/>
@@ -15071,10 +15277,12 @@
             </a:r>
           </a:p>
           <a:p>
-            <a:pPr>
-              <a:spcAft>
-                <a:spcPts val="1000"/>
-              </a:spcAft>
+            <a:pPr lvl="0" marL="457200" indent="-228600">
+              <a:buFont typeface="Calibri"/>
+              <a:spcAft>
+                <a:spcPts val="1000"/>
+              </a:spcAft>
+              <a:buSzPct val="100000"/>
               <a:buChar char="•"/>
               <a:lnSpc>
                 <a:spcPts val="2200"/>
@@ -15210,10 +15418,12 @@
           </a:bodyPr>
           <a:lstStyle/>
           <a:p>
-            <a:pPr>
-              <a:spcAft>
-                <a:spcPts val="1000"/>
-              </a:spcAft>
+            <a:pPr lvl="0" marL="457200" indent="-228600">
+              <a:buFont typeface="Calibri"/>
+              <a:spcAft>
+                <a:spcPts val="1000"/>
+              </a:spcAft>
+              <a:buSzPct val="100000"/>
               <a:buChar char="•"/>
               <a:lnSpc>
                 <a:spcPts val="2200"/>
@@ -15230,10 +15440,12 @@
             </a:r>
           </a:p>
           <a:p>
-            <a:pPr>
-              <a:spcAft>
-                <a:spcPts val="1000"/>
-              </a:spcAft>
+            <a:pPr lvl="0" marL="457200" indent="-228600">
+              <a:buFont typeface="Calibri"/>
+              <a:spcAft>
+                <a:spcPts val="1000"/>
+              </a:spcAft>
+              <a:buSzPct val="100000"/>
               <a:buChar char="•"/>
               <a:lnSpc>
                 <a:spcPts val="2200"/>
@@ -15250,10 +15462,12 @@
             </a:r>
           </a:p>
           <a:p>
-            <a:pPr>
-              <a:spcAft>
-                <a:spcPts val="1000"/>
-              </a:spcAft>
+            <a:pPr lvl="0" marL="457200" indent="-228600">
+              <a:buFont typeface="Calibri"/>
+              <a:spcAft>
+                <a:spcPts val="1000"/>
+              </a:spcAft>
+              <a:buSzPct val="100000"/>
               <a:buChar char="•"/>
               <a:lnSpc>
                 <a:spcPts val="2200"/>
@@ -15270,10 +15484,12 @@
             </a:r>
           </a:p>
           <a:p>
-            <a:pPr>
-              <a:spcAft>
-                <a:spcPts val="1000"/>
-              </a:spcAft>
+            <a:pPr lvl="0" marL="457200" indent="-228600">
+              <a:buFont typeface="Calibri"/>
+              <a:spcAft>
+                <a:spcPts val="1000"/>
+              </a:spcAft>
+              <a:buSzPct val="100000"/>
               <a:buChar char="•"/>
               <a:lnSpc>
                 <a:spcPts val="2200"/>
@@ -15290,10 +15506,12 @@
             </a:r>
           </a:p>
           <a:p>
-            <a:pPr>
-              <a:spcAft>
-                <a:spcPts val="1000"/>
-              </a:spcAft>
+            <a:pPr lvl="0" marL="457200" indent="-228600">
+              <a:buFont typeface="Calibri"/>
+              <a:spcAft>
+                <a:spcPts val="1000"/>
+              </a:spcAft>
+              <a:buSzPct val="100000"/>
               <a:buChar char="•"/>
               <a:lnSpc>
                 <a:spcPts val="2200"/>
@@ -15310,10 +15528,12 @@
             </a:r>
           </a:p>
           <a:p>
-            <a:pPr>
-              <a:spcAft>
-                <a:spcPts val="1000"/>
-              </a:spcAft>
+            <a:pPr lvl="0" marL="457200" indent="-228600">
+              <a:buFont typeface="Calibri"/>
+              <a:spcAft>
+                <a:spcPts val="1000"/>
+              </a:spcAft>
+              <a:buSzPct val="100000"/>
               <a:buChar char="•"/>
               <a:lnSpc>
                 <a:spcPts val="2200"/>
@@ -15449,10 +15669,12 @@
           </a:bodyPr>
           <a:lstStyle/>
           <a:p>
-            <a:pPr>
-              <a:spcAft>
-                <a:spcPts val="1000"/>
-              </a:spcAft>
+            <a:pPr lvl="0" marL="457200" indent="-228600">
+              <a:buFont typeface="Calibri"/>
+              <a:spcAft>
+                <a:spcPts val="1000"/>
+              </a:spcAft>
+              <a:buSzPct val="100000"/>
               <a:buChar char="•"/>
               <a:lnSpc>
                 <a:spcPts val="2200"/>
@@ -15469,10 +15691,12 @@
             </a:r>
           </a:p>
           <a:p>
-            <a:pPr>
-              <a:spcAft>
-                <a:spcPts val="1000"/>
-              </a:spcAft>
+            <a:pPr lvl="0" marL="457200" indent="-228600">
+              <a:buFont typeface="Calibri"/>
+              <a:spcAft>
+                <a:spcPts val="1000"/>
+              </a:spcAft>
+              <a:buSzPct val="100000"/>
               <a:buChar char="•"/>
               <a:lnSpc>
                 <a:spcPts val="2200"/>
@@ -15489,10 +15713,12 @@
             </a:r>
           </a:p>
           <a:p>
-            <a:pPr>
-              <a:spcAft>
-                <a:spcPts val="1000"/>
-              </a:spcAft>
+            <a:pPr lvl="0" marL="457200" indent="-228600">
+              <a:buFont typeface="Calibri"/>
+              <a:spcAft>
+                <a:spcPts val="1000"/>
+              </a:spcAft>
+              <a:buSzPct val="100000"/>
               <a:buChar char="•"/>
               <a:lnSpc>
                 <a:spcPts val="2200"/>
@@ -15509,10 +15735,12 @@
             </a:r>
           </a:p>
           <a:p>
-            <a:pPr>
-              <a:spcAft>
-                <a:spcPts val="1000"/>
-              </a:spcAft>
+            <a:pPr lvl="0" marL="457200" indent="-228600">
+              <a:buFont typeface="Calibri"/>
+              <a:spcAft>
+                <a:spcPts val="1000"/>
+              </a:spcAft>
+              <a:buSzPct val="100000"/>
               <a:buChar char="•"/>
               <a:lnSpc>
                 <a:spcPts val="2200"/>
@@ -15648,10 +15876,12 @@
           </a:bodyPr>
           <a:lstStyle/>
           <a:p>
-            <a:pPr>
-              <a:spcAft>
-                <a:spcPts val="1000"/>
-              </a:spcAft>
+            <a:pPr lvl="0" marL="457200" indent="-228600">
+              <a:buFont typeface="Calibri"/>
+              <a:spcAft>
+                <a:spcPts val="1000"/>
+              </a:spcAft>
+              <a:buSzPct val="100000"/>
               <a:buChar char="•"/>
               <a:lnSpc>
                 <a:spcPts val="2200"/>
@@ -15668,10 +15898,12 @@
             </a:r>
           </a:p>
           <a:p>
-            <a:pPr>
-              <a:spcAft>
-                <a:spcPts val="1000"/>
-              </a:spcAft>
+            <a:pPr lvl="0" marL="457200" indent="-228600">
+              <a:buFont typeface="Calibri"/>
+              <a:spcAft>
+                <a:spcPts val="1000"/>
+              </a:spcAft>
+              <a:buSzPct val="100000"/>
               <a:buChar char="•"/>
               <a:lnSpc>
                 <a:spcPts val="2200"/>
@@ -15688,10 +15920,12 @@
             </a:r>
           </a:p>
           <a:p>
-            <a:pPr>
-              <a:spcAft>
-                <a:spcPts val="1000"/>
-              </a:spcAft>
+            <a:pPr lvl="0" marL="457200" indent="-228600">
+              <a:buFont typeface="Calibri"/>
+              <a:spcAft>
+                <a:spcPts val="1000"/>
+              </a:spcAft>
+              <a:buSzPct val="100000"/>
               <a:buChar char="•"/>
               <a:lnSpc>
                 <a:spcPts val="2200"/>
@@ -15708,10 +15942,12 @@
             </a:r>
           </a:p>
           <a:p>
-            <a:pPr>
-              <a:spcAft>
-                <a:spcPts val="1000"/>
-              </a:spcAft>
+            <a:pPr lvl="0" marL="457200" indent="-228600">
+              <a:buFont typeface="Calibri"/>
+              <a:spcAft>
+                <a:spcPts val="1000"/>
+              </a:spcAft>
+              <a:buSzPct val="100000"/>
               <a:buChar char="•"/>
               <a:lnSpc>
                 <a:spcPts val="2200"/>
@@ -15847,10 +16083,12 @@
           </a:bodyPr>
           <a:lstStyle/>
           <a:p>
-            <a:pPr>
-              <a:spcAft>
-                <a:spcPts val="1000"/>
-              </a:spcAft>
+            <a:pPr lvl="0" marL="457200" indent="-228600">
+              <a:buFont typeface="Calibri"/>
+              <a:spcAft>
+                <a:spcPts val="1000"/>
+              </a:spcAft>
+              <a:buSzPct val="100000"/>
               <a:buChar char="•"/>
               <a:lnSpc>
                 <a:spcPts val="2200"/>
@@ -15867,10 +16105,12 @@
             </a:r>
           </a:p>
           <a:p>
-            <a:pPr>
-              <a:spcAft>
-                <a:spcPts val="1000"/>
-              </a:spcAft>
+            <a:pPr lvl="0" marL="457200" indent="-228600">
+              <a:buFont typeface="Calibri"/>
+              <a:spcAft>
+                <a:spcPts val="1000"/>
+              </a:spcAft>
+              <a:buSzPct val="100000"/>
               <a:buChar char="•"/>
               <a:lnSpc>
                 <a:spcPts val="2200"/>
@@ -15887,10 +16127,12 @@
             </a:r>
           </a:p>
           <a:p>
-            <a:pPr>
-              <a:spcAft>
-                <a:spcPts val="1000"/>
-              </a:spcAft>
+            <a:pPr lvl="0" marL="457200" indent="-228600">
+              <a:buFont typeface="Calibri"/>
+              <a:spcAft>
+                <a:spcPts val="1000"/>
+              </a:spcAft>
+              <a:buSzPct val="100000"/>
               <a:buChar char="•"/>
               <a:lnSpc>
                 <a:spcPts val="2200"/>
@@ -15907,10 +16149,12 @@
             </a:r>
           </a:p>
           <a:p>
-            <a:pPr>
-              <a:spcAft>
-                <a:spcPts val="1000"/>
-              </a:spcAft>
+            <a:pPr lvl="0" marL="457200" indent="-228600">
+              <a:buFont typeface="Calibri"/>
+              <a:spcAft>
+                <a:spcPts val="1000"/>
+              </a:spcAft>
+              <a:buSzPct val="100000"/>
               <a:buChar char="•"/>
               <a:lnSpc>
                 <a:spcPts val="2200"/>
@@ -15927,10 +16171,12 @@
             </a:r>
           </a:p>
           <a:p>
-            <a:pPr>
-              <a:spcAft>
-                <a:spcPts val="1000"/>
-              </a:spcAft>
+            <a:pPr lvl="0" marL="457200" indent="-228600">
+              <a:buFont typeface="Calibri"/>
+              <a:spcAft>
+                <a:spcPts val="1000"/>
+              </a:spcAft>
+              <a:buSzPct val="100000"/>
               <a:buChar char="•"/>
               <a:lnSpc>
                 <a:spcPts val="2200"/>
@@ -15947,10 +16193,12 @@
             </a:r>
           </a:p>
           <a:p>
-            <a:pPr>
-              <a:spcAft>
-                <a:spcPts val="1000"/>
-              </a:spcAft>
+            <a:pPr lvl="0" marL="457200" indent="-228600">
+              <a:buFont typeface="Calibri"/>
+              <a:spcAft>
+                <a:spcPts val="1000"/>
+              </a:spcAft>
+              <a:buSzPct val="100000"/>
               <a:buChar char="•"/>
               <a:lnSpc>
                 <a:spcPts val="2200"/>
@@ -16086,10 +16334,12 @@
           </a:bodyPr>
           <a:lstStyle/>
           <a:p>
-            <a:pPr>
-              <a:spcAft>
-                <a:spcPts val="1000"/>
-              </a:spcAft>
+            <a:pPr lvl="0" marL="457200" indent="-228600">
+              <a:buFont typeface="Calibri"/>
+              <a:spcAft>
+                <a:spcPts val="1000"/>
+              </a:spcAft>
+              <a:buSzPct val="100000"/>
               <a:buChar char="•"/>
               <a:lnSpc>
                 <a:spcPts val="2200"/>
@@ -16106,10 +16356,12 @@
             </a:r>
           </a:p>
           <a:p>
-            <a:pPr>
-              <a:spcAft>
-                <a:spcPts val="1000"/>
-              </a:spcAft>
+            <a:pPr lvl="0" marL="457200" indent="-228600">
+              <a:buFont typeface="Calibri"/>
+              <a:spcAft>
+                <a:spcPts val="1000"/>
+              </a:spcAft>
+              <a:buSzPct val="100000"/>
               <a:buChar char="•"/>
               <a:lnSpc>
                 <a:spcPts val="2200"/>
@@ -16126,10 +16378,12 @@
             </a:r>
           </a:p>
           <a:p>
-            <a:pPr>
-              <a:spcAft>
-                <a:spcPts val="1000"/>
-              </a:spcAft>
+            <a:pPr lvl="0" marL="457200" indent="-228600">
+              <a:buFont typeface="Calibri"/>
+              <a:spcAft>
+                <a:spcPts val="1000"/>
+              </a:spcAft>
+              <a:buSzPct val="100000"/>
               <a:buChar char="•"/>
               <a:lnSpc>
                 <a:spcPts val="2200"/>
@@ -16146,10 +16400,12 @@
             </a:r>
           </a:p>
           <a:p>
-            <a:pPr>
-              <a:spcAft>
-                <a:spcPts val="1000"/>
-              </a:spcAft>
+            <a:pPr lvl="0" marL="457200" indent="-228600">
+              <a:buFont typeface="Calibri"/>
+              <a:spcAft>
+                <a:spcPts val="1000"/>
+              </a:spcAft>
+              <a:buSzPct val="100000"/>
               <a:buChar char="•"/>
               <a:lnSpc>
                 <a:spcPts val="2200"/>
@@ -16285,10 +16541,12 @@
           </a:bodyPr>
           <a:lstStyle/>
           <a:p>
-            <a:pPr>
-              <a:spcAft>
-                <a:spcPts val="1000"/>
-              </a:spcAft>
+            <a:pPr lvl="0" marL="457200" indent="-228600">
+              <a:buFont typeface="Calibri"/>
+              <a:spcAft>
+                <a:spcPts val="1000"/>
+              </a:spcAft>
+              <a:buSzPct val="100000"/>
               <a:buChar char="•"/>
               <a:lnSpc>
                 <a:spcPts val="2200"/>
@@ -16305,10 +16563,12 @@
             </a:r>
           </a:p>
           <a:p>
-            <a:pPr>
-              <a:spcAft>
-                <a:spcPts val="1000"/>
-              </a:spcAft>
+            <a:pPr lvl="0" marL="457200" indent="-228600">
+              <a:buFont typeface="Calibri"/>
+              <a:spcAft>
+                <a:spcPts val="1000"/>
+              </a:spcAft>
+              <a:buSzPct val="100000"/>
               <a:buChar char="•"/>
               <a:lnSpc>
                 <a:spcPts val="2200"/>
@@ -16325,10 +16585,12 @@
             </a:r>
           </a:p>
           <a:p>
-            <a:pPr>
-              <a:spcAft>
-                <a:spcPts val="1000"/>
-              </a:spcAft>
+            <a:pPr lvl="0" marL="457200" indent="-228600">
+              <a:buFont typeface="Calibri"/>
+              <a:spcAft>
+                <a:spcPts val="1000"/>
+              </a:spcAft>
+              <a:buSzPct val="100000"/>
               <a:buChar char="•"/>
               <a:lnSpc>
                 <a:spcPts val="2200"/>
@@ -16345,10 +16607,12 @@
             </a:r>
           </a:p>
           <a:p>
-            <a:pPr>
-              <a:spcAft>
-                <a:spcPts val="1000"/>
-              </a:spcAft>
+            <a:pPr lvl="0" marL="457200" indent="-228600">
+              <a:buFont typeface="Calibri"/>
+              <a:spcAft>
+                <a:spcPts val="1000"/>
+              </a:spcAft>
+              <a:buSzPct val="100000"/>
               <a:buChar char="•"/>
               <a:lnSpc>
                 <a:spcPts val="2200"/>
@@ -16365,10 +16629,12 @@
             </a:r>
           </a:p>
           <a:p>
-            <a:pPr>
-              <a:spcAft>
-                <a:spcPts val="1000"/>
-              </a:spcAft>
+            <a:pPr lvl="0" marL="457200" indent="-228600">
+              <a:buFont typeface="Calibri"/>
+              <a:spcAft>
+                <a:spcPts val="1000"/>
+              </a:spcAft>
+              <a:buSzPct val="100000"/>
               <a:buChar char="•"/>
               <a:lnSpc>
                 <a:spcPts val="2200"/>
@@ -16385,10 +16651,12 @@
             </a:r>
           </a:p>
           <a:p>
-            <a:pPr>
-              <a:spcAft>
-                <a:spcPts val="1000"/>
-              </a:spcAft>
+            <a:pPr lvl="0" marL="457200" indent="-228600">
+              <a:buFont typeface="Calibri"/>
+              <a:spcAft>
+                <a:spcPts val="1000"/>
+              </a:spcAft>
+              <a:buSzPct val="100000"/>
               <a:buChar char="•"/>
               <a:lnSpc>
                 <a:spcPts val="2200"/>
@@ -16524,10 +16792,12 @@
           </a:bodyPr>
           <a:lstStyle/>
           <a:p>
-            <a:pPr>
-              <a:spcAft>
-                <a:spcPts val="1000"/>
-              </a:spcAft>
+            <a:pPr lvl="0" marL="457200" indent="-228600">
+              <a:buFont typeface="Calibri"/>
+              <a:spcAft>
+                <a:spcPts val="1000"/>
+              </a:spcAft>
+              <a:buSzPct val="100000"/>
               <a:buChar char="•"/>
               <a:lnSpc>
                 <a:spcPts val="2200"/>
@@ -16544,10 +16814,12 @@
             </a:r>
           </a:p>
           <a:p>
-            <a:pPr>
-              <a:spcAft>
-                <a:spcPts val="1000"/>
-              </a:spcAft>
+            <a:pPr lvl="0" marL="457200" indent="-228600">
+              <a:buFont typeface="Calibri"/>
+              <a:spcAft>
+                <a:spcPts val="1000"/>
+              </a:spcAft>
+              <a:buSzPct val="100000"/>
               <a:buChar char="•"/>
               <a:lnSpc>
                 <a:spcPts val="2200"/>
@@ -16564,10 +16836,12 @@
             </a:r>
           </a:p>
           <a:p>
-            <a:pPr>
-              <a:spcAft>
-                <a:spcPts val="1000"/>
-              </a:spcAft>
+            <a:pPr lvl="0" marL="457200" indent="-228600">
+              <a:buFont typeface="Calibri"/>
+              <a:spcAft>
+                <a:spcPts val="1000"/>
+              </a:spcAft>
+              <a:buSzPct val="100000"/>
               <a:buChar char="•"/>
               <a:lnSpc>
                 <a:spcPts val="2200"/>
@@ -16584,10 +16858,12 @@
             </a:r>
           </a:p>
           <a:p>
-            <a:pPr>
-              <a:spcAft>
-                <a:spcPts val="1000"/>
-              </a:spcAft>
+            <a:pPr lvl="0" marL="457200" indent="-228600">
+              <a:buFont typeface="Calibri"/>
+              <a:spcAft>
+                <a:spcPts val="1000"/>
+              </a:spcAft>
+              <a:buSzPct val="100000"/>
               <a:buChar char="•"/>
               <a:lnSpc>
                 <a:spcPts val="2200"/>
@@ -16723,10 +16999,12 @@
           </a:bodyPr>
           <a:lstStyle/>
           <a:p>
-            <a:pPr>
-              <a:spcAft>
-                <a:spcPts val="1000"/>
-              </a:spcAft>
+            <a:pPr lvl="0" marL="457200" indent="-228600">
+              <a:buFont typeface="Calibri"/>
+              <a:spcAft>
+                <a:spcPts val="1000"/>
+              </a:spcAft>
+              <a:buSzPct val="100000"/>
               <a:buChar char="•"/>
               <a:lnSpc>
                 <a:spcPts val="2200"/>
@@ -16743,10 +17021,12 @@
             </a:r>
           </a:p>
           <a:p>
-            <a:pPr>
-              <a:spcAft>
-                <a:spcPts val="1000"/>
-              </a:spcAft>
+            <a:pPr lvl="0" marL="457200" indent="-228600">
+              <a:buFont typeface="Calibri"/>
+              <a:spcAft>
+                <a:spcPts val="1000"/>
+              </a:spcAft>
+              <a:buSzPct val="100000"/>
               <a:buChar char="•"/>
               <a:lnSpc>
                 <a:spcPts val="2200"/>
@@ -16882,10 +17162,12 @@
           </a:bodyPr>
           <a:lstStyle/>
           <a:p>
-            <a:pPr>
-              <a:spcAft>
-                <a:spcPts val="1000"/>
-              </a:spcAft>
+            <a:pPr lvl="0" marL="457200" indent="-228600">
+              <a:buFont typeface="Calibri"/>
+              <a:spcAft>
+                <a:spcPts val="1000"/>
+              </a:spcAft>
+              <a:buSzPct val="100000"/>
               <a:buChar char="•"/>
               <a:lnSpc>
                 <a:spcPts val="2200"/>
@@ -16902,10 +17184,12 @@
             </a:r>
           </a:p>
           <a:p>
-            <a:pPr>
-              <a:spcAft>
-                <a:spcPts val="1000"/>
-              </a:spcAft>
+            <a:pPr lvl="0" marL="457200" indent="-228600">
+              <a:buFont typeface="Calibri"/>
+              <a:spcAft>
+                <a:spcPts val="1000"/>
+              </a:spcAft>
+              <a:buSzPct val="100000"/>
               <a:buChar char="•"/>
               <a:lnSpc>
                 <a:spcPts val="2200"/>
@@ -16922,10 +17206,12 @@
             </a:r>
           </a:p>
           <a:p>
-            <a:pPr>
-              <a:spcAft>
-                <a:spcPts val="1000"/>
-              </a:spcAft>
+            <a:pPr lvl="0" marL="457200" indent="-228600">
+              <a:buFont typeface="Calibri"/>
+              <a:spcAft>
+                <a:spcPts val="1000"/>
+              </a:spcAft>
+              <a:buSzPct val="100000"/>
               <a:buChar char="•"/>
               <a:lnSpc>
                 <a:spcPts val="2200"/>
@@ -17061,10 +17347,12 @@
           </a:bodyPr>
           <a:lstStyle/>
           <a:p>
-            <a:pPr>
-              <a:spcAft>
-                <a:spcPts val="1000"/>
-              </a:spcAft>
+            <a:pPr lvl="0" marL="457200" indent="-228600">
+              <a:buFont typeface="Calibri"/>
+              <a:spcAft>
+                <a:spcPts val="1000"/>
+              </a:spcAft>
+              <a:buSzPct val="100000"/>
               <a:buChar char="•"/>
               <a:lnSpc>
                 <a:spcPts val="2200"/>
@@ -17081,10 +17369,12 @@
             </a:r>
           </a:p>
           <a:p>
-            <a:pPr>
-              <a:spcAft>
-                <a:spcPts val="1000"/>
-              </a:spcAft>
+            <a:pPr lvl="0" marL="457200" indent="-228600">
+              <a:buFont typeface="Calibri"/>
+              <a:spcAft>
+                <a:spcPts val="1000"/>
+              </a:spcAft>
+              <a:buSzPct val="100000"/>
               <a:buChar char="•"/>
               <a:lnSpc>
                 <a:spcPts val="2200"/>
@@ -17101,10 +17391,12 @@
             </a:r>
           </a:p>
           <a:p>
-            <a:pPr>
-              <a:spcAft>
-                <a:spcPts val="1000"/>
-              </a:spcAft>
+            <a:pPr lvl="0" marL="457200" indent="-228600">
+              <a:buFont typeface="Calibri"/>
+              <a:spcAft>
+                <a:spcPts val="1000"/>
+              </a:spcAft>
+              <a:buSzPct val="100000"/>
               <a:buChar char="•"/>
               <a:lnSpc>
                 <a:spcPts val="2200"/>
@@ -17121,10 +17413,12 @@
             </a:r>
           </a:p>
           <a:p>
-            <a:pPr>
-              <a:spcAft>
-                <a:spcPts val="1000"/>
-              </a:spcAft>
+            <a:pPr lvl="0" marL="457200" indent="-228600">
+              <a:buFont typeface="Calibri"/>
+              <a:spcAft>
+                <a:spcPts val="1000"/>
+              </a:spcAft>
+              <a:buSzPct val="100000"/>
               <a:buChar char="•"/>
               <a:lnSpc>
                 <a:spcPts val="2200"/>
@@ -17260,10 +17554,12 @@
           </a:bodyPr>
           <a:lstStyle/>
           <a:p>
-            <a:pPr>
-              <a:spcAft>
-                <a:spcPts val="1000"/>
-              </a:spcAft>
+            <a:pPr lvl="0" marL="457200" indent="-228600">
+              <a:buFont typeface="Calibri"/>
+              <a:spcAft>
+                <a:spcPts val="1000"/>
+              </a:spcAft>
+              <a:buSzPct val="100000"/>
               <a:buChar char="•"/>
               <a:lnSpc>
                 <a:spcPts val="2200"/>
@@ -17280,10 +17576,12 @@
             </a:r>
           </a:p>
           <a:p>
-            <a:pPr>
-              <a:spcAft>
-                <a:spcPts val="1000"/>
-              </a:spcAft>
+            <a:pPr lvl="0" marL="457200" indent="-228600">
+              <a:buFont typeface="Calibri"/>
+              <a:spcAft>
+                <a:spcPts val="1000"/>
+              </a:spcAft>
+              <a:buSzPct val="100000"/>
               <a:buChar char="•"/>
               <a:lnSpc>
                 <a:spcPts val="2200"/>
@@ -17300,10 +17598,12 @@
             </a:r>
           </a:p>
           <a:p>
-            <a:pPr>
-              <a:spcAft>
-                <a:spcPts val="1000"/>
-              </a:spcAft>
+            <a:pPr lvl="0" marL="457200" indent="-228600">
+              <a:buFont typeface="Calibri"/>
+              <a:spcAft>
+                <a:spcPts val="1000"/>
+              </a:spcAft>
+              <a:buSzPct val="100000"/>
               <a:buChar char="•"/>
               <a:lnSpc>
                 <a:spcPts val="2200"/>
@@ -17320,10 +17620,12 @@
             </a:r>
           </a:p>
           <a:p>
-            <a:pPr>
-              <a:spcAft>
-                <a:spcPts val="1000"/>
-              </a:spcAft>
+            <a:pPr lvl="0" marL="457200" indent="-228600">
+              <a:buFont typeface="Calibri"/>
+              <a:spcAft>
+                <a:spcPts val="1000"/>
+              </a:spcAft>
+              <a:buSzPct val="100000"/>
               <a:buChar char="•"/>
               <a:lnSpc>
                 <a:spcPts val="2200"/>
@@ -17459,10 +17761,12 @@
           </a:bodyPr>
           <a:lstStyle/>
           <a:p>
-            <a:pPr>
-              <a:spcAft>
-                <a:spcPts val="1000"/>
-              </a:spcAft>
+            <a:pPr lvl="0" marL="457200" indent="-228600">
+              <a:buFont typeface="Calibri"/>
+              <a:spcAft>
+                <a:spcPts val="1000"/>
+              </a:spcAft>
+              <a:buSzPct val="100000"/>
               <a:buChar char="•"/>
               <a:lnSpc>
                 <a:spcPts val="2200"/>
@@ -17479,10 +17783,12 @@
             </a:r>
           </a:p>
           <a:p>
-            <a:pPr>
-              <a:spcAft>
-                <a:spcPts val="1000"/>
-              </a:spcAft>
+            <a:pPr lvl="0" marL="457200" indent="-228600">
+              <a:buFont typeface="Calibri"/>
+              <a:spcAft>
+                <a:spcPts val="1000"/>
+              </a:spcAft>
+              <a:buSzPct val="100000"/>
               <a:buChar char="•"/>
               <a:lnSpc>
                 <a:spcPts val="2200"/>
@@ -17499,10 +17805,12 @@
             </a:r>
           </a:p>
           <a:p>
-            <a:pPr>
-              <a:spcAft>
-                <a:spcPts val="1000"/>
-              </a:spcAft>
+            <a:pPr lvl="0" marL="457200" indent="-228600">
+              <a:buFont typeface="Calibri"/>
+              <a:spcAft>
+                <a:spcPts val="1000"/>
+              </a:spcAft>
+              <a:buSzPct val="100000"/>
               <a:buChar char="•"/>
               <a:lnSpc>
                 <a:spcPts val="2200"/>
@@ -17519,10 +17827,12 @@
             </a:r>
           </a:p>
           <a:p>
-            <a:pPr>
-              <a:spcAft>
-                <a:spcPts val="1000"/>
-              </a:spcAft>
+            <a:pPr lvl="0" marL="457200" indent="-228600">
+              <a:buFont typeface="Calibri"/>
+              <a:spcAft>
+                <a:spcPts val="1000"/>
+              </a:spcAft>
+              <a:buSzPct val="100000"/>
               <a:buChar char="•"/>
               <a:lnSpc>
                 <a:spcPts val="2200"/>
@@ -17539,10 +17849,12 @@
             </a:r>
           </a:p>
           <a:p>
-            <a:pPr>
-              <a:spcAft>
-                <a:spcPts val="1000"/>
-              </a:spcAft>
+            <a:pPr lvl="0" marL="457200" indent="-228600">
+              <a:buFont typeface="Calibri"/>
+              <a:spcAft>
+                <a:spcPts val="1000"/>
+              </a:spcAft>
+              <a:buSzPct val="100000"/>
               <a:buChar char="•"/>
               <a:lnSpc>
                 <a:spcPts val="2200"/>
@@ -17559,10 +17871,12 @@
             </a:r>
           </a:p>
           <a:p>
-            <a:pPr>
-              <a:spcAft>
-                <a:spcPts val="1000"/>
-              </a:spcAft>
+            <a:pPr lvl="0" marL="457200" indent="-228600">
+              <a:buFont typeface="Calibri"/>
+              <a:spcAft>
+                <a:spcPts val="1000"/>
+              </a:spcAft>
+              <a:buSzPct val="100000"/>
               <a:buChar char="•"/>
               <a:lnSpc>
                 <a:spcPts val="2200"/>
@@ -17698,10 +18012,12 @@
           </a:bodyPr>
           <a:lstStyle/>
           <a:p>
-            <a:pPr>
-              <a:spcAft>
-                <a:spcPts val="1000"/>
-              </a:spcAft>
+            <a:pPr lvl="0" marL="457200" indent="-228600">
+              <a:buFont typeface="Calibri"/>
+              <a:spcAft>
+                <a:spcPts val="1000"/>
+              </a:spcAft>
+              <a:buSzPct val="100000"/>
               <a:buChar char="•"/>
               <a:lnSpc>
                 <a:spcPts val="2200"/>
@@ -17718,10 +18034,12 @@
             </a:r>
           </a:p>
           <a:p>
-            <a:pPr>
-              <a:spcAft>
-                <a:spcPts val="1000"/>
-              </a:spcAft>
+            <a:pPr lvl="0" marL="457200" indent="-228600">
+              <a:buFont typeface="Calibri"/>
+              <a:spcAft>
+                <a:spcPts val="1000"/>
+              </a:spcAft>
+              <a:buSzPct val="100000"/>
               <a:buChar char="•"/>
               <a:lnSpc>
                 <a:spcPts val="2200"/>
@@ -17738,10 +18056,12 @@
             </a:r>
           </a:p>
           <a:p>
-            <a:pPr>
-              <a:spcAft>
-                <a:spcPts val="1000"/>
-              </a:spcAft>
+            <a:pPr lvl="0" marL="457200" indent="-228600">
+              <a:buFont typeface="Calibri"/>
+              <a:spcAft>
+                <a:spcPts val="1000"/>
+              </a:spcAft>
+              <a:buSzPct val="100000"/>
               <a:buChar char="•"/>
               <a:lnSpc>
                 <a:spcPts val="2200"/>
@@ -17877,10 +18197,12 @@
           </a:bodyPr>
           <a:lstStyle/>
           <a:p>
-            <a:pPr>
-              <a:spcAft>
-                <a:spcPts val="1000"/>
-              </a:spcAft>
+            <a:pPr lvl="0" marL="457200" indent="-228600">
+              <a:buFont typeface="Calibri"/>
+              <a:spcAft>
+                <a:spcPts val="1000"/>
+              </a:spcAft>
+              <a:buSzPct val="100000"/>
               <a:buChar char="•"/>
               <a:lnSpc>
                 <a:spcPts val="2200"/>
@@ -17897,10 +18219,12 @@
             </a:r>
           </a:p>
           <a:p>
-            <a:pPr>
-              <a:spcAft>
-                <a:spcPts val="1000"/>
-              </a:spcAft>
+            <a:pPr lvl="0" marL="457200" indent="-228600">
+              <a:buFont typeface="Calibri"/>
+              <a:spcAft>
+                <a:spcPts val="1000"/>
+              </a:spcAft>
+              <a:buSzPct val="100000"/>
               <a:buChar char="•"/>
               <a:lnSpc>
                 <a:spcPts val="2200"/>
@@ -17917,10 +18241,12 @@
             </a:r>
           </a:p>
           <a:p>
-            <a:pPr>
-              <a:spcAft>
-                <a:spcPts val="1000"/>
-              </a:spcAft>
+            <a:pPr lvl="0" marL="457200" indent="-228600">
+              <a:buFont typeface="Calibri"/>
+              <a:spcAft>
+                <a:spcPts val="1000"/>
+              </a:spcAft>
+              <a:buSzPct val="100000"/>
               <a:buChar char="•"/>
               <a:lnSpc>
                 <a:spcPts val="2200"/>
@@ -17937,10 +18263,12 @@
             </a:r>
           </a:p>
           <a:p>
-            <a:pPr>
-              <a:spcAft>
-                <a:spcPts val="1000"/>
-              </a:spcAft>
+            <a:pPr lvl="0" marL="457200" indent="-228600">
+              <a:buFont typeface="Calibri"/>
+              <a:spcAft>
+                <a:spcPts val="1000"/>
+              </a:spcAft>
+              <a:buSzPct val="100000"/>
               <a:buChar char="•"/>
               <a:lnSpc>
                 <a:spcPts val="2200"/>
@@ -18076,10 +18404,12 @@
           </a:bodyPr>
           <a:lstStyle/>
           <a:p>
-            <a:pPr>
-              <a:spcAft>
-                <a:spcPts val="1000"/>
-              </a:spcAft>
+            <a:pPr lvl="0" marL="457200" indent="-228600">
+              <a:buFont typeface="Calibri"/>
+              <a:spcAft>
+                <a:spcPts val="1000"/>
+              </a:spcAft>
+              <a:buSzPct val="100000"/>
               <a:buChar char="•"/>
               <a:lnSpc>
                 <a:spcPts val="2200"/>
@@ -18096,10 +18426,12 @@
             </a:r>
           </a:p>
           <a:p>
-            <a:pPr>
-              <a:spcAft>
-                <a:spcPts val="1000"/>
-              </a:spcAft>
+            <a:pPr lvl="0" marL="457200" indent="-228600">
+              <a:buFont typeface="Calibri"/>
+              <a:spcAft>
+                <a:spcPts val="1000"/>
+              </a:spcAft>
+              <a:buSzPct val="100000"/>
               <a:buChar char="•"/>
               <a:lnSpc>
                 <a:spcPts val="2200"/>
@@ -18116,10 +18448,12 @@
             </a:r>
           </a:p>
           <a:p>
-            <a:pPr>
-              <a:spcAft>
-                <a:spcPts val="1000"/>
-              </a:spcAft>
+            <a:pPr lvl="0" marL="457200" indent="-228600">
+              <a:buFont typeface="Calibri"/>
+              <a:spcAft>
+                <a:spcPts val="1000"/>
+              </a:spcAft>
+              <a:buSzPct val="100000"/>
               <a:buChar char="•"/>
               <a:lnSpc>
                 <a:spcPts val="2200"/>
@@ -18136,10 +18470,12 @@
             </a:r>
           </a:p>
           <a:p>
-            <a:pPr>
-              <a:spcAft>
-                <a:spcPts val="1000"/>
-              </a:spcAft>
+            <a:pPr lvl="0" marL="457200" indent="-228600">
+              <a:buFont typeface="Calibri"/>
+              <a:spcAft>
+                <a:spcPts val="1000"/>
+              </a:spcAft>
+              <a:buSzPct val="100000"/>
               <a:buChar char="•"/>
               <a:lnSpc>
                 <a:spcPts val="2200"/>
@@ -18156,10 +18492,12 @@
             </a:r>
           </a:p>
           <a:p>
-            <a:pPr>
-              <a:spcAft>
-                <a:spcPts val="1000"/>
-              </a:spcAft>
+            <a:pPr lvl="0" marL="457200" indent="-228600">
+              <a:buFont typeface="Calibri"/>
+              <a:spcAft>
+                <a:spcPts val="1000"/>
+              </a:spcAft>
+              <a:buSzPct val="100000"/>
               <a:buChar char="•"/>
               <a:lnSpc>
                 <a:spcPts val="2200"/>
@@ -18176,10 +18514,12 @@
             </a:r>
           </a:p>
           <a:p>
-            <a:pPr>
-              <a:spcAft>
-                <a:spcPts val="1000"/>
-              </a:spcAft>
+            <a:pPr lvl="0" marL="457200" indent="-228600">
+              <a:buFont typeface="Calibri"/>
+              <a:spcAft>
+                <a:spcPts val="1000"/>
+              </a:spcAft>
+              <a:buSzPct val="100000"/>
               <a:buChar char="•"/>
               <a:lnSpc>
                 <a:spcPts val="2200"/>
@@ -18315,10 +18655,12 @@
           </a:bodyPr>
           <a:lstStyle/>
           <a:p>
-            <a:pPr>
-              <a:spcAft>
-                <a:spcPts val="1000"/>
-              </a:spcAft>
+            <a:pPr lvl="0" marL="457200" indent="-228600">
+              <a:buFont typeface="Calibri"/>
+              <a:spcAft>
+                <a:spcPts val="1000"/>
+              </a:spcAft>
+              <a:buSzPct val="100000"/>
               <a:buChar char="•"/>
               <a:lnSpc>
                 <a:spcPts val="2200"/>
@@ -18335,10 +18677,12 @@
             </a:r>
           </a:p>
           <a:p>
-            <a:pPr>
-              <a:spcAft>
-                <a:spcPts val="1000"/>
-              </a:spcAft>
+            <a:pPr lvl="0" marL="457200" indent="-228600">
+              <a:buFont typeface="Calibri"/>
+              <a:spcAft>
+                <a:spcPts val="1000"/>
+              </a:spcAft>
+              <a:buSzPct val="100000"/>
               <a:buChar char="•"/>
               <a:lnSpc>
                 <a:spcPts val="2200"/>
@@ -18355,10 +18699,12 @@
             </a:r>
           </a:p>
           <a:p>
-            <a:pPr>
-              <a:spcAft>
-                <a:spcPts val="1000"/>
-              </a:spcAft>
+            <a:pPr lvl="0" marL="457200" indent="-228600">
+              <a:buFont typeface="Calibri"/>
+              <a:spcAft>
+                <a:spcPts val="1000"/>
+              </a:spcAft>
+              <a:buSzPct val="100000"/>
               <a:buChar char="•"/>
               <a:lnSpc>
                 <a:spcPts val="2200"/>
@@ -18375,10 +18721,12 @@
             </a:r>
           </a:p>
           <a:p>
-            <a:pPr>
-              <a:spcAft>
-                <a:spcPts val="1000"/>
-              </a:spcAft>
+            <a:pPr lvl="0" marL="457200" indent="-228600">
+              <a:buFont typeface="Calibri"/>
+              <a:spcAft>
+                <a:spcPts val="1000"/>
+              </a:spcAft>
+              <a:buSzPct val="100000"/>
               <a:buChar char="•"/>
               <a:lnSpc>
                 <a:spcPts val="2200"/>
@@ -18514,10 +18862,12 @@
           </a:bodyPr>
           <a:lstStyle/>
           <a:p>
-            <a:pPr>
-              <a:spcAft>
-                <a:spcPts val="1000"/>
-              </a:spcAft>
+            <a:pPr lvl="0" marL="457200" indent="-228600">
+              <a:buFont typeface="Calibri"/>
+              <a:spcAft>
+                <a:spcPts val="1000"/>
+              </a:spcAft>
+              <a:buSzPct val="100000"/>
               <a:buChar char="•"/>
               <a:lnSpc>
                 <a:spcPts val="2200"/>
@@ -18534,10 +18884,12 @@
             </a:r>
           </a:p>
           <a:p>
-            <a:pPr>
-              <a:spcAft>
-                <a:spcPts val="1000"/>
-              </a:spcAft>
+            <a:pPr lvl="0" marL="457200" indent="-228600">
+              <a:buFont typeface="Calibri"/>
+              <a:spcAft>
+                <a:spcPts val="1000"/>
+              </a:spcAft>
+              <a:buSzPct val="100000"/>
               <a:buChar char="•"/>
               <a:lnSpc>
                 <a:spcPts val="2200"/>
@@ -18554,10 +18906,12 @@
             </a:r>
           </a:p>
           <a:p>
-            <a:pPr>
-              <a:spcAft>
-                <a:spcPts val="1000"/>
-              </a:spcAft>
+            <a:pPr lvl="0" marL="457200" indent="-228600">
+              <a:buFont typeface="Calibri"/>
+              <a:spcAft>
+                <a:spcPts val="1000"/>
+              </a:spcAft>
+              <a:buSzPct val="100000"/>
               <a:buChar char="•"/>
               <a:lnSpc>
                 <a:spcPts val="2200"/>
@@ -18574,10 +18928,12 @@
             </a:r>
           </a:p>
           <a:p>
-            <a:pPr>
-              <a:spcAft>
-                <a:spcPts val="1000"/>
-              </a:spcAft>
+            <a:pPr lvl="0" marL="457200" indent="-228600">
+              <a:buFont typeface="Calibri"/>
+              <a:spcAft>
+                <a:spcPts val="1000"/>
+              </a:spcAft>
+              <a:buSzPct val="100000"/>
               <a:buChar char="•"/>
               <a:lnSpc>
                 <a:spcPts val="2200"/>
@@ -18713,10 +19069,12 @@
           </a:bodyPr>
           <a:lstStyle/>
           <a:p>
-            <a:pPr>
-              <a:spcAft>
-                <a:spcPts val="1000"/>
-              </a:spcAft>
+            <a:pPr lvl="0" marL="457200" indent="-228600">
+              <a:buFont typeface="Calibri"/>
+              <a:spcAft>
+                <a:spcPts val="1000"/>
+              </a:spcAft>
+              <a:buSzPct val="100000"/>
               <a:buChar char="•"/>
               <a:lnSpc>
                 <a:spcPts val="2200"/>
@@ -18733,10 +19091,12 @@
             </a:r>
           </a:p>
           <a:p>
-            <a:pPr>
-              <a:spcAft>
-                <a:spcPts val="1000"/>
-              </a:spcAft>
+            <a:pPr lvl="0" marL="457200" indent="-228600">
+              <a:buFont typeface="Calibri"/>
+              <a:spcAft>
+                <a:spcPts val="1000"/>
+              </a:spcAft>
+              <a:buSzPct val="100000"/>
               <a:buChar char="•"/>
               <a:lnSpc>
                 <a:spcPts val="2200"/>
@@ -18872,10 +19232,12 @@
           </a:bodyPr>
           <a:lstStyle/>
           <a:p>
-            <a:pPr>
-              <a:spcAft>
-                <a:spcPts val="1000"/>
-              </a:spcAft>
+            <a:pPr lvl="0" marL="457200" indent="-228600">
+              <a:buFont typeface="Calibri"/>
+              <a:spcAft>
+                <a:spcPts val="1000"/>
+              </a:spcAft>
+              <a:buSzPct val="100000"/>
               <a:buChar char="•"/>
               <a:lnSpc>
                 <a:spcPts val="2200"/>
@@ -18892,10 +19254,12 @@
             </a:r>
           </a:p>
           <a:p>
-            <a:pPr>
-              <a:spcAft>
-                <a:spcPts val="1000"/>
-              </a:spcAft>
+            <a:pPr lvl="0" marL="457200" indent="-228600">
+              <a:buFont typeface="Calibri"/>
+              <a:spcAft>
+                <a:spcPts val="1000"/>
+              </a:spcAft>
+              <a:buSzPct val="100000"/>
               <a:buChar char="•"/>
               <a:lnSpc>
                 <a:spcPts val="2200"/>
@@ -19031,10 +19395,12 @@
           </a:bodyPr>
           <a:lstStyle/>
           <a:p>
-            <a:pPr>
-              <a:spcAft>
-                <a:spcPts val="1000"/>
-              </a:spcAft>
+            <a:pPr lvl="0" marL="457200" indent="-228600">
+              <a:buFont typeface="Calibri"/>
+              <a:spcAft>
+                <a:spcPts val="1000"/>
+              </a:spcAft>
+              <a:buSzPct val="100000"/>
               <a:buChar char="•"/>
               <a:lnSpc>
                 <a:spcPts val="2200"/>
@@ -19051,10 +19417,12 @@
             </a:r>
           </a:p>
           <a:p>
-            <a:pPr>
-              <a:spcAft>
-                <a:spcPts val="1000"/>
-              </a:spcAft>
+            <a:pPr lvl="0" marL="457200" indent="-228600">
+              <a:buFont typeface="Calibri"/>
+              <a:spcAft>
+                <a:spcPts val="1000"/>
+              </a:spcAft>
+              <a:buSzPct val="100000"/>
               <a:buChar char="•"/>
               <a:lnSpc>
                 <a:spcPts val="2200"/>
@@ -19071,10 +19439,12 @@
             </a:r>
           </a:p>
           <a:p>
-            <a:pPr>
-              <a:spcAft>
-                <a:spcPts val="1000"/>
-              </a:spcAft>
+            <a:pPr lvl="0" marL="457200" indent="-228600">
+              <a:buFont typeface="Calibri"/>
+              <a:spcAft>
+                <a:spcPts val="1000"/>
+              </a:spcAft>
+              <a:buSzPct val="100000"/>
               <a:buChar char="•"/>
               <a:lnSpc>
                 <a:spcPts val="2200"/>
@@ -19210,10 +19580,12 @@
           </a:bodyPr>
           <a:lstStyle/>
           <a:p>
-            <a:pPr>
-              <a:spcAft>
-                <a:spcPts val="1000"/>
-              </a:spcAft>
+            <a:pPr lvl="0" marL="457200" indent="-228600">
+              <a:buFont typeface="Calibri"/>
+              <a:spcAft>
+                <a:spcPts val="1000"/>
+              </a:spcAft>
+              <a:buSzPct val="100000"/>
               <a:buChar char="•"/>
               <a:lnSpc>
                 <a:spcPts val="2200"/>
@@ -19230,10 +19602,12 @@
             </a:r>
           </a:p>
           <a:p>
-            <a:pPr>
-              <a:spcAft>
-                <a:spcPts val="1000"/>
-              </a:spcAft>
+            <a:pPr lvl="0" marL="457200" indent="-228600">
+              <a:buFont typeface="Calibri"/>
+              <a:spcAft>
+                <a:spcPts val="1000"/>
+              </a:spcAft>
+              <a:buSzPct val="100000"/>
               <a:buChar char="•"/>
               <a:lnSpc>
                 <a:spcPts val="2200"/>
@@ -19250,10 +19624,12 @@
             </a:r>
           </a:p>
           <a:p>
-            <a:pPr>
-              <a:spcAft>
-                <a:spcPts val="1000"/>
-              </a:spcAft>
+            <a:pPr lvl="0" marL="457200" indent="-228600">
+              <a:buFont typeface="Calibri"/>
+              <a:spcAft>
+                <a:spcPts val="1000"/>
+              </a:spcAft>
+              <a:buSzPct val="100000"/>
               <a:buChar char="•"/>
               <a:lnSpc>
                 <a:spcPts val="2200"/>
@@ -19389,10 +19765,12 @@
           </a:bodyPr>
           <a:lstStyle/>
           <a:p>
-            <a:pPr>
-              <a:spcAft>
-                <a:spcPts val="1000"/>
-              </a:spcAft>
+            <a:pPr lvl="0" marL="457200" indent="-228600">
+              <a:buFont typeface="Calibri"/>
+              <a:spcAft>
+                <a:spcPts val="1000"/>
+              </a:spcAft>
+              <a:buSzPct val="100000"/>
               <a:buChar char="•"/>
               <a:lnSpc>
                 <a:spcPts val="2200"/>
@@ -19409,10 +19787,12 @@
             </a:r>
           </a:p>
           <a:p>
-            <a:pPr>
-              <a:spcAft>
-                <a:spcPts val="1000"/>
-              </a:spcAft>
+            <a:pPr lvl="0" marL="457200" indent="-228600">
+              <a:buFont typeface="Calibri"/>
+              <a:spcAft>
+                <a:spcPts val="1000"/>
+              </a:spcAft>
+              <a:buSzPct val="100000"/>
               <a:buChar char="•"/>
               <a:lnSpc>
                 <a:spcPts val="2200"/>
@@ -19429,10 +19809,12 @@
             </a:r>
           </a:p>
           <a:p>
-            <a:pPr>
-              <a:spcAft>
-                <a:spcPts val="1000"/>
-              </a:spcAft>
+            <a:pPr lvl="0" marL="457200" indent="-228600">
+              <a:buFont typeface="Calibri"/>
+              <a:spcAft>
+                <a:spcPts val="1000"/>
+              </a:spcAft>
+              <a:buSzPct val="100000"/>
               <a:buChar char="•"/>
               <a:lnSpc>
                 <a:spcPts val="2200"/>
@@ -19449,10 +19831,12 @@
             </a:r>
           </a:p>
           <a:p>
-            <a:pPr>
-              <a:spcAft>
-                <a:spcPts val="1000"/>
-              </a:spcAft>
+            <a:pPr lvl="0" marL="457200" indent="-228600">
+              <a:buFont typeface="Calibri"/>
+              <a:spcAft>
+                <a:spcPts val="1000"/>
+              </a:spcAft>
+              <a:buSzPct val="100000"/>
               <a:buChar char="•"/>
               <a:lnSpc>
                 <a:spcPts val="2200"/>
@@ -19469,10 +19853,12 @@
             </a:r>
           </a:p>
           <a:p>
-            <a:pPr>
-              <a:spcAft>
-                <a:spcPts val="1000"/>
-              </a:spcAft>
+            <a:pPr lvl="0" marL="457200" indent="-228600">
+              <a:buFont typeface="Calibri"/>
+              <a:spcAft>
+                <a:spcPts val="1000"/>
+              </a:spcAft>
+              <a:buSzPct val="100000"/>
               <a:buChar char="•"/>
               <a:lnSpc>
                 <a:spcPts val="2200"/>
@@ -19489,10 +19875,12 @@
             </a:r>
           </a:p>
           <a:p>
-            <a:pPr>
-              <a:spcAft>
-                <a:spcPts val="1000"/>
-              </a:spcAft>
+            <a:pPr lvl="0" marL="457200" indent="-228600">
+              <a:buFont typeface="Calibri"/>
+              <a:spcAft>
+                <a:spcPts val="1000"/>
+              </a:spcAft>
+              <a:buSzPct val="100000"/>
               <a:buChar char="•"/>
               <a:lnSpc>
                 <a:spcPts val="2200"/>
@@ -19628,10 +20016,12 @@
           </a:bodyPr>
           <a:lstStyle/>
           <a:p>
-            <a:pPr>
-              <a:spcAft>
-                <a:spcPts val="1000"/>
-              </a:spcAft>
+            <a:pPr lvl="0" marL="457200" indent="-228600">
+              <a:buFont typeface="Calibri"/>
+              <a:spcAft>
+                <a:spcPts val="1000"/>
+              </a:spcAft>
+              <a:buSzPct val="100000"/>
               <a:buChar char="•"/>
               <a:lnSpc>
                 <a:spcPts val="2200"/>
@@ -19648,10 +20038,12 @@
             </a:r>
           </a:p>
           <a:p>
-            <a:pPr>
-              <a:spcAft>
-                <a:spcPts val="1000"/>
-              </a:spcAft>
+            <a:pPr lvl="0" marL="457200" indent="-228600">
+              <a:buFont typeface="Calibri"/>
+              <a:spcAft>
+                <a:spcPts val="1000"/>
+              </a:spcAft>
+              <a:buSzPct val="100000"/>
               <a:buChar char="•"/>
               <a:lnSpc>
                 <a:spcPts val="2200"/>
@@ -19668,10 +20060,12 @@
             </a:r>
           </a:p>
           <a:p>
-            <a:pPr>
-              <a:spcAft>
-                <a:spcPts val="1000"/>
-              </a:spcAft>
+            <a:pPr lvl="0" marL="457200" indent="-228600">
+              <a:buFont typeface="Calibri"/>
+              <a:spcAft>
+                <a:spcPts val="1000"/>
+              </a:spcAft>
+              <a:buSzPct val="100000"/>
               <a:buChar char="•"/>
               <a:lnSpc>
                 <a:spcPts val="2200"/>
@@ -19688,10 +20082,12 @@
             </a:r>
           </a:p>
           <a:p>
-            <a:pPr>
-              <a:spcAft>
-                <a:spcPts val="1000"/>
-              </a:spcAft>
+            <a:pPr lvl="0" marL="457200" indent="-228600">
+              <a:buFont typeface="Calibri"/>
+              <a:spcAft>
+                <a:spcPts val="1000"/>
+              </a:spcAft>
+              <a:buSzPct val="100000"/>
               <a:buChar char="•"/>
               <a:lnSpc>
                 <a:spcPts val="2200"/>
@@ -19827,10 +20223,12 @@
           </a:bodyPr>
           <a:lstStyle/>
           <a:p>
-            <a:pPr>
-              <a:spcAft>
-                <a:spcPts val="1000"/>
-              </a:spcAft>
+            <a:pPr lvl="0" marL="457200" indent="-228600">
+              <a:buFont typeface="Calibri"/>
+              <a:spcAft>
+                <a:spcPts val="1000"/>
+              </a:spcAft>
+              <a:buSzPct val="100000"/>
               <a:buChar char="•"/>
               <a:lnSpc>
                 <a:spcPts val="2200"/>
@@ -19847,10 +20245,12 @@
             </a:r>
           </a:p>
           <a:p>
-            <a:pPr>
-              <a:spcAft>
-                <a:spcPts val="1000"/>
-              </a:spcAft>
+            <a:pPr lvl="0" marL="457200" indent="-228600">
+              <a:buFont typeface="Calibri"/>
+              <a:spcAft>
+                <a:spcPts val="1000"/>
+              </a:spcAft>
+              <a:buSzPct val="100000"/>
               <a:buChar char="•"/>
               <a:lnSpc>
                 <a:spcPts val="2200"/>
@@ -19867,10 +20267,12 @@
             </a:r>
           </a:p>
           <a:p>
-            <a:pPr>
-              <a:spcAft>
-                <a:spcPts val="1000"/>
-              </a:spcAft>
+            <a:pPr lvl="0" marL="457200" indent="-228600">
+              <a:buFont typeface="Calibri"/>
+              <a:spcAft>
+                <a:spcPts val="1000"/>
+              </a:spcAft>
+              <a:buSzPct val="100000"/>
               <a:buChar char="•"/>
               <a:lnSpc>
                 <a:spcPts val="2200"/>
@@ -19887,10 +20289,12 @@
             </a:r>
           </a:p>
           <a:p>
-            <a:pPr>
-              <a:spcAft>
-                <a:spcPts val="1000"/>
-              </a:spcAft>
+            <a:pPr lvl="0" marL="457200" indent="-228600">
+              <a:buFont typeface="Calibri"/>
+              <a:spcAft>
+                <a:spcPts val="1000"/>
+              </a:spcAft>
+              <a:buSzPct val="100000"/>
               <a:buChar char="•"/>
               <a:lnSpc>
                 <a:spcPts val="2200"/>
@@ -19907,10 +20311,12 @@
             </a:r>
           </a:p>
           <a:p>
-            <a:pPr>
-              <a:spcAft>
-                <a:spcPts val="1000"/>
-              </a:spcAft>
+            <a:pPr lvl="0" marL="457200" indent="-228600">
+              <a:buFont typeface="Calibri"/>
+              <a:spcAft>
+                <a:spcPts val="1000"/>
+              </a:spcAft>
+              <a:buSzPct val="100000"/>
               <a:buChar char="•"/>
               <a:lnSpc>
                 <a:spcPts val="2200"/>
@@ -19927,10 +20333,12 @@
             </a:r>
           </a:p>
           <a:p>
-            <a:pPr>
-              <a:spcAft>
-                <a:spcPts val="1000"/>
-              </a:spcAft>
+            <a:pPr lvl="0" marL="457200" indent="-228600">
+              <a:buFont typeface="Calibri"/>
+              <a:spcAft>
+                <a:spcPts val="1000"/>
+              </a:spcAft>
+              <a:buSzPct val="100000"/>
               <a:buChar char="•"/>
               <a:lnSpc>
                 <a:spcPts val="2200"/>
@@ -20066,10 +20474,12 @@
           </a:bodyPr>
           <a:lstStyle/>
           <a:p>
-            <a:pPr>
-              <a:spcAft>
-                <a:spcPts val="1000"/>
-              </a:spcAft>
+            <a:pPr lvl="0" marL="457200" indent="-228600">
+              <a:buFont typeface="Calibri"/>
+              <a:spcAft>
+                <a:spcPts val="1000"/>
+              </a:spcAft>
+              <a:buSzPct val="100000"/>
               <a:buChar char="•"/>
               <a:lnSpc>
                 <a:spcPts val="2200"/>
@@ -20086,10 +20496,12 @@
             </a:r>
           </a:p>
           <a:p>
-            <a:pPr>
-              <a:spcAft>
-                <a:spcPts val="1000"/>
-              </a:spcAft>
+            <a:pPr lvl="0" marL="457200" indent="-228600">
+              <a:buFont typeface="Calibri"/>
+              <a:spcAft>
+                <a:spcPts val="1000"/>
+              </a:spcAft>
+              <a:buSzPct val="100000"/>
               <a:buChar char="•"/>
               <a:lnSpc>
                 <a:spcPts val="2200"/>
@@ -20106,10 +20518,12 @@
             </a:r>
           </a:p>
           <a:p>
-            <a:pPr>
-              <a:spcAft>
-                <a:spcPts val="1000"/>
-              </a:spcAft>
+            <a:pPr lvl="0" marL="457200" indent="-228600">
+              <a:buFont typeface="Calibri"/>
+              <a:spcAft>
+                <a:spcPts val="1000"/>
+              </a:spcAft>
+              <a:buSzPct val="100000"/>
               <a:buChar char="•"/>
               <a:lnSpc>
                 <a:spcPts val="2200"/>
@@ -20126,10 +20540,12 @@
             </a:r>
           </a:p>
           <a:p>
-            <a:pPr>
-              <a:spcAft>
-                <a:spcPts val="1000"/>
-              </a:spcAft>
+            <a:pPr lvl="0" marL="457200" indent="-228600">
+              <a:buFont typeface="Calibri"/>
+              <a:spcAft>
+                <a:spcPts val="1000"/>
+              </a:spcAft>
+              <a:buSzPct val="100000"/>
               <a:buChar char="•"/>
               <a:lnSpc>
                 <a:spcPts val="2200"/>
@@ -20146,10 +20562,12 @@
             </a:r>
           </a:p>
           <a:p>
-            <a:pPr>
-              <a:spcAft>
-                <a:spcPts val="1000"/>
-              </a:spcAft>
+            <a:pPr lvl="0" marL="457200" indent="-228600">
+              <a:buFont typeface="Calibri"/>
+              <a:spcAft>
+                <a:spcPts val="1000"/>
+              </a:spcAft>
+              <a:buSzPct val="100000"/>
               <a:buChar char="•"/>
               <a:lnSpc>
                 <a:spcPts val="2200"/>
@@ -20166,10 +20584,12 @@
             </a:r>
           </a:p>
           <a:p>
-            <a:pPr>
-              <a:spcAft>
-                <a:spcPts val="1000"/>
-              </a:spcAft>
+            <a:pPr lvl="0" marL="457200" indent="-228600">
+              <a:buFont typeface="Calibri"/>
+              <a:spcAft>
+                <a:spcPts val="1000"/>
+              </a:spcAft>
+              <a:buSzPct val="100000"/>
               <a:buChar char="•"/>
               <a:lnSpc>
                 <a:spcPts val="2200"/>
@@ -20305,10 +20725,12 @@
           </a:bodyPr>
           <a:lstStyle/>
           <a:p>
-            <a:pPr>
-              <a:spcAft>
-                <a:spcPts val="1000"/>
-              </a:spcAft>
+            <a:pPr lvl="0" marL="457200" indent="-228600">
+              <a:buFont typeface="Calibri"/>
+              <a:spcAft>
+                <a:spcPts val="1000"/>
+              </a:spcAft>
+              <a:buSzPct val="100000"/>
               <a:buChar char="•"/>
               <a:lnSpc>
                 <a:spcPts val="2200"/>
@@ -20325,10 +20747,12 @@
             </a:r>
           </a:p>
           <a:p>
-            <a:pPr>
-              <a:spcAft>
-                <a:spcPts val="1000"/>
-              </a:spcAft>
+            <a:pPr lvl="0" marL="457200" indent="-228600">
+              <a:buFont typeface="Calibri"/>
+              <a:spcAft>
+                <a:spcPts val="1000"/>
+              </a:spcAft>
+              <a:buSzPct val="100000"/>
               <a:buChar char="•"/>
               <a:lnSpc>
                 <a:spcPts val="2200"/>
@@ -20345,10 +20769,12 @@
             </a:r>
           </a:p>
           <a:p>
-            <a:pPr>
-              <a:spcAft>
-                <a:spcPts val="1000"/>
-              </a:spcAft>
+            <a:pPr lvl="0" marL="457200" indent="-228600">
+              <a:buFont typeface="Calibri"/>
+              <a:spcAft>
+                <a:spcPts val="1000"/>
+              </a:spcAft>
+              <a:buSzPct val="100000"/>
               <a:buChar char="•"/>
               <a:lnSpc>
                 <a:spcPts val="2200"/>
@@ -20365,10 +20791,12 @@
             </a:r>
           </a:p>
           <a:p>
-            <a:pPr>
-              <a:spcAft>
-                <a:spcPts val="1000"/>
-              </a:spcAft>
+            <a:pPr lvl="0" marL="457200" indent="-228600">
+              <a:buFont typeface="Calibri"/>
+              <a:spcAft>
+                <a:spcPts val="1000"/>
+              </a:spcAft>
+              <a:buSzPct val="100000"/>
               <a:buChar char="•"/>
               <a:lnSpc>
                 <a:spcPts val="2200"/>
@@ -20504,10 +20932,12 @@
           </a:bodyPr>
           <a:lstStyle/>
           <a:p>
-            <a:pPr>
-              <a:spcAft>
-                <a:spcPts val="1000"/>
-              </a:spcAft>
+            <a:pPr lvl="0" marL="457200" indent="-228600">
+              <a:buFont typeface="Calibri"/>
+              <a:spcAft>
+                <a:spcPts val="1000"/>
+              </a:spcAft>
+              <a:buSzPct val="100000"/>
               <a:buChar char="•"/>
               <a:lnSpc>
                 <a:spcPts val="2200"/>
@@ -20524,10 +20954,12 @@
             </a:r>
           </a:p>
           <a:p>
-            <a:pPr>
-              <a:spcAft>
-                <a:spcPts val="1000"/>
-              </a:spcAft>
+            <a:pPr lvl="0" marL="457200" indent="-228600">
+              <a:buFont typeface="Calibri"/>
+              <a:spcAft>
+                <a:spcPts val="1000"/>
+              </a:spcAft>
+              <a:buSzPct val="100000"/>
               <a:buChar char="•"/>
               <a:lnSpc>
                 <a:spcPts val="2200"/>
@@ -20544,10 +20976,12 @@
             </a:r>
           </a:p>
           <a:p>
-            <a:pPr>
-              <a:spcAft>
-                <a:spcPts val="1000"/>
-              </a:spcAft>
+            <a:pPr lvl="0" marL="457200" indent="-228600">
+              <a:buFont typeface="Calibri"/>
+              <a:spcAft>
+                <a:spcPts val="1000"/>
+              </a:spcAft>
+              <a:buSzPct val="100000"/>
               <a:buChar char="•"/>
               <a:lnSpc>
                 <a:spcPts val="2200"/>
@@ -20683,10 +21117,12 @@
           </a:bodyPr>
           <a:lstStyle/>
           <a:p>
-            <a:pPr>
-              <a:spcAft>
-                <a:spcPts val="1000"/>
-              </a:spcAft>
+            <a:pPr lvl="0" marL="457200" indent="-228600">
+              <a:buFont typeface="Calibri"/>
+              <a:spcAft>
+                <a:spcPts val="1000"/>
+              </a:spcAft>
+              <a:buSzPct val="100000"/>
               <a:buChar char="•"/>
               <a:lnSpc>
                 <a:spcPts val="2200"/>
@@ -20703,10 +21139,12 @@
             </a:r>
           </a:p>
           <a:p>
-            <a:pPr>
-              <a:spcAft>
-                <a:spcPts val="1000"/>
-              </a:spcAft>
+            <a:pPr lvl="0" marL="457200" indent="-228600">
+              <a:buFont typeface="Calibri"/>
+              <a:spcAft>
+                <a:spcPts val="1000"/>
+              </a:spcAft>
+              <a:buSzPct val="100000"/>
               <a:buChar char="•"/>
               <a:lnSpc>
                 <a:spcPts val="2200"/>
@@ -20842,10 +21280,12 @@
           </a:bodyPr>
           <a:lstStyle/>
           <a:p>
-            <a:pPr>
-              <a:spcAft>
-                <a:spcPts val="1000"/>
-              </a:spcAft>
+            <a:pPr lvl="0" marL="457200" indent="-228600">
+              <a:buFont typeface="Calibri"/>
+              <a:spcAft>
+                <a:spcPts val="1000"/>
+              </a:spcAft>
+              <a:buSzPct val="100000"/>
               <a:buChar char="•"/>
               <a:lnSpc>
                 <a:spcPts val="2200"/>
@@ -20862,10 +21302,12 @@
             </a:r>
           </a:p>
           <a:p>
-            <a:pPr>
-              <a:spcAft>
-                <a:spcPts val="1000"/>
-              </a:spcAft>
+            <a:pPr lvl="0" marL="457200" indent="-228600">
+              <a:buFont typeface="Calibri"/>
+              <a:spcAft>
+                <a:spcPts val="1000"/>
+              </a:spcAft>
+              <a:buSzPct val="100000"/>
               <a:buChar char="•"/>
               <a:lnSpc>
                 <a:spcPts val="2200"/>
@@ -20882,10 +21324,12 @@
             </a:r>
           </a:p>
           <a:p>
-            <a:pPr>
-              <a:spcAft>
-                <a:spcPts val="1000"/>
-              </a:spcAft>
+            <a:pPr lvl="0" marL="457200" indent="-228600">
+              <a:buFont typeface="Calibri"/>
+              <a:spcAft>
+                <a:spcPts val="1000"/>
+              </a:spcAft>
+              <a:buSzPct val="100000"/>
               <a:buChar char="•"/>
               <a:lnSpc>
                 <a:spcPts val="2200"/>
@@ -21021,10 +21465,12 @@
           </a:bodyPr>
           <a:lstStyle/>
           <a:p>
-            <a:pPr>
-              <a:spcAft>
-                <a:spcPts val="1000"/>
-              </a:spcAft>
+            <a:pPr lvl="0" marL="457200" indent="-228600">
+              <a:buFont typeface="Calibri"/>
+              <a:spcAft>
+                <a:spcPts val="1000"/>
+              </a:spcAft>
+              <a:buSzPct val="100000"/>
               <a:buChar char="•"/>
               <a:lnSpc>
                 <a:spcPts val="2200"/>
@@ -21041,10 +21487,12 @@
             </a:r>
           </a:p>
           <a:p>
-            <a:pPr>
-              <a:spcAft>
-                <a:spcPts val="1000"/>
-              </a:spcAft>
+            <a:pPr lvl="0" marL="457200" indent="-228600">
+              <a:buFont typeface="Calibri"/>
+              <a:spcAft>
+                <a:spcPts val="1000"/>
+              </a:spcAft>
+              <a:buSzPct val="100000"/>
               <a:buChar char="•"/>
               <a:lnSpc>
                 <a:spcPts val="2200"/>
@@ -21061,10 +21509,12 @@
             </a:r>
           </a:p>
           <a:p>
-            <a:pPr>
-              <a:spcAft>
-                <a:spcPts val="1000"/>
-              </a:spcAft>
+            <a:pPr lvl="0" marL="457200" indent="-228600">
+              <a:buFont typeface="Calibri"/>
+              <a:spcAft>
+                <a:spcPts val="1000"/>
+              </a:spcAft>
+              <a:buSzPct val="100000"/>
               <a:buChar char="•"/>
               <a:lnSpc>
                 <a:spcPts val="2200"/>
@@ -21081,10 +21531,12 @@
             </a:r>
           </a:p>
           <a:p>
-            <a:pPr>
-              <a:spcAft>
-                <a:spcPts val="1000"/>
-              </a:spcAft>
+            <a:pPr lvl="0" marL="457200" indent="-228600">
+              <a:buFont typeface="Calibri"/>
+              <a:spcAft>
+                <a:spcPts val="1000"/>
+              </a:spcAft>
+              <a:buSzPct val="100000"/>
               <a:buChar char="•"/>
               <a:lnSpc>
                 <a:spcPts val="2200"/>
@@ -21220,10 +21672,12 @@
           </a:bodyPr>
           <a:lstStyle/>
           <a:p>
-            <a:pPr>
-              <a:spcAft>
-                <a:spcPts val="1000"/>
-              </a:spcAft>
+            <a:pPr lvl="0" marL="457200" indent="-228600">
+              <a:buFont typeface="Calibri"/>
+              <a:spcAft>
+                <a:spcPts val="1000"/>
+              </a:spcAft>
+              <a:buSzPct val="100000"/>
               <a:buChar char="•"/>
               <a:lnSpc>
                 <a:spcPts val="2200"/>
@@ -21240,10 +21694,12 @@
             </a:r>
           </a:p>
           <a:p>
-            <a:pPr>
-              <a:spcAft>
-                <a:spcPts val="1000"/>
-              </a:spcAft>
+            <a:pPr lvl="0" marL="457200" indent="-228600">
+              <a:buFont typeface="Calibri"/>
+              <a:spcAft>
+                <a:spcPts val="1000"/>
+              </a:spcAft>
+              <a:buSzPct val="100000"/>
               <a:buChar char="•"/>
               <a:lnSpc>
                 <a:spcPts val="2200"/>
@@ -21260,10 +21716,12 @@
             </a:r>
           </a:p>
           <a:p>
-            <a:pPr>
-              <a:spcAft>
-                <a:spcPts val="1000"/>
-              </a:spcAft>
+            <a:pPr lvl="0" marL="457200" indent="-228600">
+              <a:buFont typeface="Calibri"/>
+              <a:spcAft>
+                <a:spcPts val="1000"/>
+              </a:spcAft>
+              <a:buSzPct val="100000"/>
               <a:buChar char="•"/>
               <a:lnSpc>
                 <a:spcPts val="2200"/>
@@ -21280,10 +21738,12 @@
             </a:r>
           </a:p>
           <a:p>
-            <a:pPr>
-              <a:spcAft>
-                <a:spcPts val="1000"/>
-              </a:spcAft>
+            <a:pPr lvl="0" marL="457200" indent="-228600">
+              <a:buFont typeface="Calibri"/>
+              <a:spcAft>
+                <a:spcPts val="1000"/>
+              </a:spcAft>
+              <a:buSzPct val="100000"/>
               <a:buChar char="•"/>
               <a:lnSpc>
                 <a:spcPts val="2200"/>
@@ -21419,10 +21879,12 @@
           </a:bodyPr>
           <a:lstStyle/>
           <a:p>
-            <a:pPr>
-              <a:spcAft>
-                <a:spcPts val="1000"/>
-              </a:spcAft>
+            <a:pPr lvl="0" marL="457200" indent="-228600">
+              <a:buFont typeface="Calibri"/>
+              <a:spcAft>
+                <a:spcPts val="1000"/>
+              </a:spcAft>
+              <a:buSzPct val="100000"/>
               <a:buChar char="•"/>
               <a:lnSpc>
                 <a:spcPts val="2200"/>
@@ -21439,10 +21901,12 @@
             </a:r>
           </a:p>
           <a:p>
-            <a:pPr>
-              <a:spcAft>
-                <a:spcPts val="1000"/>
-              </a:spcAft>
+            <a:pPr lvl="0" marL="457200" indent="-228600">
+              <a:buFont typeface="Calibri"/>
+              <a:spcAft>
+                <a:spcPts val="1000"/>
+              </a:spcAft>
+              <a:buSzPct val="100000"/>
               <a:buChar char="•"/>
               <a:lnSpc>
                 <a:spcPts val="2200"/>
@@ -21459,10 +21923,12 @@
             </a:r>
           </a:p>
           <a:p>
-            <a:pPr>
-              <a:spcAft>
-                <a:spcPts val="1000"/>
-              </a:spcAft>
+            <a:pPr lvl="0" marL="457200" indent="-228600">
+              <a:buFont typeface="Calibri"/>
+              <a:spcAft>
+                <a:spcPts val="1000"/>
+              </a:spcAft>
+              <a:buSzPct val="100000"/>
               <a:buChar char="•"/>
               <a:lnSpc>
                 <a:spcPts val="2200"/>
@@ -21479,10 +21945,12 @@
             </a:r>
           </a:p>
           <a:p>
-            <a:pPr>
-              <a:spcAft>
-                <a:spcPts val="1000"/>
-              </a:spcAft>
+            <a:pPr lvl="0" marL="457200" indent="-228600">
+              <a:buFont typeface="Calibri"/>
+              <a:spcAft>
+                <a:spcPts val="1000"/>
+              </a:spcAft>
+              <a:buSzPct val="100000"/>
               <a:buChar char="•"/>
               <a:lnSpc>
                 <a:spcPts val="2200"/>
@@ -21499,10 +21967,12 @@
             </a:r>
           </a:p>
           <a:p>
-            <a:pPr>
-              <a:spcAft>
-                <a:spcPts val="1000"/>
-              </a:spcAft>
+            <a:pPr lvl="0" marL="457200" indent="-228600">
+              <a:buFont typeface="Calibri"/>
+              <a:spcAft>
+                <a:spcPts val="1000"/>
+              </a:spcAft>
+              <a:buSzPct val="100000"/>
               <a:buChar char="•"/>
               <a:lnSpc>
                 <a:spcPts val="2200"/>
@@ -21519,10 +21989,12 @@
             </a:r>
           </a:p>
           <a:p>
-            <a:pPr>
-              <a:spcAft>
-                <a:spcPts val="1000"/>
-              </a:spcAft>
+            <a:pPr lvl="0" marL="457200" indent="-228600">
+              <a:buFont typeface="Calibri"/>
+              <a:spcAft>
+                <a:spcPts val="1000"/>
+              </a:spcAft>
+              <a:buSzPct val="100000"/>
               <a:buChar char="•"/>
               <a:lnSpc>
                 <a:spcPts val="2200"/>
@@ -21658,10 +22130,12 @@
           </a:bodyPr>
           <a:lstStyle/>
           <a:p>
-            <a:pPr>
-              <a:spcAft>
-                <a:spcPts val="1000"/>
-              </a:spcAft>
+            <a:pPr lvl="0" marL="457200" indent="-228600">
+              <a:buFont typeface="Calibri"/>
+              <a:spcAft>
+                <a:spcPts val="1000"/>
+              </a:spcAft>
+              <a:buSzPct val="100000"/>
               <a:buChar char="•"/>
               <a:lnSpc>
                 <a:spcPts val="2200"/>
@@ -21678,10 +22152,12 @@
             </a:r>
           </a:p>
           <a:p>
-            <a:pPr>
-              <a:spcAft>
-                <a:spcPts val="1000"/>
-              </a:spcAft>
+            <a:pPr lvl="0" marL="457200" indent="-228600">
+              <a:buFont typeface="Calibri"/>
+              <a:spcAft>
+                <a:spcPts val="1000"/>
+              </a:spcAft>
+              <a:buSzPct val="100000"/>
               <a:buChar char="•"/>
               <a:lnSpc>
                 <a:spcPts val="2200"/>
@@ -21698,10 +22174,12 @@
             </a:r>
           </a:p>
           <a:p>
-            <a:pPr>
-              <a:spcAft>
-                <a:spcPts val="1000"/>
-              </a:spcAft>
+            <a:pPr lvl="0" marL="457200" indent="-228600">
+              <a:buFont typeface="Calibri"/>
+              <a:spcAft>
+                <a:spcPts val="1000"/>
+              </a:spcAft>
+              <a:buSzPct val="100000"/>
               <a:buChar char="•"/>
               <a:lnSpc>
                 <a:spcPts val="2200"/>
@@ -21718,10 +22196,12 @@
             </a:r>
           </a:p>
           <a:p>
-            <a:pPr>
-              <a:spcAft>
-                <a:spcPts val="1000"/>
-              </a:spcAft>
+            <a:pPr lvl="0" marL="457200" indent="-228600">
+              <a:buFont typeface="Calibri"/>
+              <a:spcAft>
+                <a:spcPts val="1000"/>
+              </a:spcAft>
+              <a:buSzPct val="100000"/>
               <a:buChar char="•"/>
               <a:lnSpc>
                 <a:spcPts val="2200"/>
@@ -21857,10 +22337,12 @@
           </a:bodyPr>
           <a:lstStyle/>
           <a:p>
-            <a:pPr>
-              <a:spcAft>
-                <a:spcPts val="1000"/>
-              </a:spcAft>
+            <a:pPr lvl="0" marL="457200" indent="-228600">
+              <a:buFont typeface="Calibri"/>
+              <a:spcAft>
+                <a:spcPts val="1000"/>
+              </a:spcAft>
+              <a:buSzPct val="100000"/>
               <a:buChar char="•"/>
               <a:lnSpc>
                 <a:spcPts val="2200"/>
@@ -21877,10 +22359,12 @@
             </a:r>
           </a:p>
           <a:p>
-            <a:pPr>
-              <a:spcAft>
-                <a:spcPts val="1000"/>
-              </a:spcAft>
+            <a:pPr lvl="0" marL="457200" indent="-228600">
+              <a:buFont typeface="Calibri"/>
+              <a:spcAft>
+                <a:spcPts val="1000"/>
+              </a:spcAft>
+              <a:buSzPct val="100000"/>
               <a:buChar char="•"/>
               <a:lnSpc>
                 <a:spcPts val="2200"/>
@@ -21897,10 +22381,12 @@
             </a:r>
           </a:p>
           <a:p>
-            <a:pPr>
-              <a:spcAft>
-                <a:spcPts val="1000"/>
-              </a:spcAft>
+            <a:pPr lvl="0" marL="457200" indent="-228600">
+              <a:buFont typeface="Calibri"/>
+              <a:spcAft>
+                <a:spcPts val="1000"/>
+              </a:spcAft>
+              <a:buSzPct val="100000"/>
               <a:buChar char="•"/>
               <a:lnSpc>
                 <a:spcPts val="2200"/>
@@ -21917,10 +22403,12 @@
             </a:r>
           </a:p>
           <a:p>
-            <a:pPr>
-              <a:spcAft>
-                <a:spcPts val="1000"/>
-              </a:spcAft>
+            <a:pPr lvl="0" marL="457200" indent="-228600">
+              <a:buFont typeface="Calibri"/>
+              <a:spcAft>
+                <a:spcPts val="1000"/>
+              </a:spcAft>
+              <a:buSzPct val="100000"/>
               <a:buChar char="•"/>
               <a:lnSpc>
                 <a:spcPts val="2200"/>
@@ -21937,10 +22425,12 @@
             </a:r>
           </a:p>
           <a:p>
-            <a:pPr>
-              <a:spcAft>
-                <a:spcPts val="1000"/>
-              </a:spcAft>
+            <a:pPr lvl="0" marL="457200" indent="-228600">
+              <a:buFont typeface="Calibri"/>
+              <a:spcAft>
+                <a:spcPts val="1000"/>
+              </a:spcAft>
+              <a:buSzPct val="100000"/>
               <a:buChar char="•"/>
               <a:lnSpc>
                 <a:spcPts val="2200"/>
@@ -21957,10 +22447,12 @@
             </a:r>
           </a:p>
           <a:p>
-            <a:pPr>
-              <a:spcAft>
-                <a:spcPts val="1000"/>
-              </a:spcAft>
+            <a:pPr lvl="0" marL="457200" indent="-228600">
+              <a:buFont typeface="Calibri"/>
+              <a:spcAft>
+                <a:spcPts val="1000"/>
+              </a:spcAft>
+              <a:buSzPct val="100000"/>
               <a:buChar char="•"/>
               <a:lnSpc>
                 <a:spcPts val="2200"/>
@@ -22096,10 +22588,12 @@
           </a:bodyPr>
           <a:lstStyle/>
           <a:p>
-            <a:pPr>
-              <a:spcAft>
-                <a:spcPts val="1000"/>
-              </a:spcAft>
+            <a:pPr lvl="0" marL="457200" indent="-228600">
+              <a:buFont typeface="Calibri"/>
+              <a:spcAft>
+                <a:spcPts val="1000"/>
+              </a:spcAft>
+              <a:buSzPct val="100000"/>
               <a:buChar char="•"/>
               <a:lnSpc>
                 <a:spcPts val="2200"/>
@@ -22116,10 +22610,12 @@
             </a:r>
           </a:p>
           <a:p>
-            <a:pPr>
-              <a:spcAft>
-                <a:spcPts val="1000"/>
-              </a:spcAft>
+            <a:pPr lvl="0" marL="457200" indent="-228600">
+              <a:buFont typeface="Calibri"/>
+              <a:spcAft>
+                <a:spcPts val="1000"/>
+              </a:spcAft>
+              <a:buSzPct val="100000"/>
               <a:buChar char="•"/>
               <a:lnSpc>
                 <a:spcPts val="2200"/>
@@ -22136,10 +22632,12 @@
             </a:r>
           </a:p>
           <a:p>
-            <a:pPr>
-              <a:spcAft>
-                <a:spcPts val="1000"/>
-              </a:spcAft>
+            <a:pPr lvl="0" marL="457200" indent="-228600">
+              <a:buFont typeface="Calibri"/>
+              <a:spcAft>
+                <a:spcPts val="1000"/>
+              </a:spcAft>
+              <a:buSzPct val="100000"/>
               <a:buChar char="•"/>
               <a:lnSpc>
                 <a:spcPts val="2200"/>
@@ -22156,10 +22654,12 @@
             </a:r>
           </a:p>
           <a:p>
-            <a:pPr>
-              <a:spcAft>
-                <a:spcPts val="1000"/>
-              </a:spcAft>
+            <a:pPr lvl="0" marL="457200" indent="-228600">
+              <a:buFont typeface="Calibri"/>
+              <a:spcAft>
+                <a:spcPts val="1000"/>
+              </a:spcAft>
+              <a:buSzPct val="100000"/>
               <a:buChar char="•"/>
               <a:lnSpc>
                 <a:spcPts val="2200"/>
@@ -22295,10 +22795,12 @@
           </a:bodyPr>
           <a:lstStyle/>
           <a:p>
-            <a:pPr>
-              <a:spcAft>
-                <a:spcPts val="1000"/>
-              </a:spcAft>
+            <a:pPr lvl="0" marL="457200" indent="-228600">
+              <a:buFont typeface="Calibri"/>
+              <a:spcAft>
+                <a:spcPts val="1000"/>
+              </a:spcAft>
+              <a:buSzPct val="100000"/>
               <a:buChar char="•"/>
               <a:lnSpc>
                 <a:spcPts val="2200"/>
@@ -22315,10 +22817,12 @@
             </a:r>
           </a:p>
           <a:p>
-            <a:pPr>
-              <a:spcAft>
-                <a:spcPts val="1000"/>
-              </a:spcAft>
+            <a:pPr lvl="0" marL="457200" indent="-228600">
+              <a:buFont typeface="Calibri"/>
+              <a:spcAft>
+                <a:spcPts val="1000"/>
+              </a:spcAft>
+              <a:buSzPct val="100000"/>
               <a:buChar char="•"/>
               <a:lnSpc>
                 <a:spcPts val="2200"/>
@@ -22335,10 +22839,12 @@
             </a:r>
           </a:p>
           <a:p>
-            <a:pPr>
-              <a:spcAft>
-                <a:spcPts val="1000"/>
-              </a:spcAft>
+            <a:pPr lvl="0" marL="457200" indent="-228600">
+              <a:buFont typeface="Calibri"/>
+              <a:spcAft>
+                <a:spcPts val="1000"/>
+              </a:spcAft>
+              <a:buSzPct val="100000"/>
               <a:buChar char="•"/>
               <a:lnSpc>
                 <a:spcPts val="2200"/>
@@ -22474,10 +22980,12 @@
           </a:bodyPr>
           <a:lstStyle/>
           <a:p>
-            <a:pPr>
-              <a:spcAft>
-                <a:spcPts val="1000"/>
-              </a:spcAft>
+            <a:pPr lvl="0" marL="457200" indent="-228600">
+              <a:buFont typeface="Calibri"/>
+              <a:spcAft>
+                <a:spcPts val="1000"/>
+              </a:spcAft>
+              <a:buSzPct val="100000"/>
               <a:buChar char="•"/>
               <a:lnSpc>
                 <a:spcPts val="2200"/>
@@ -22494,10 +23002,12 @@
             </a:r>
           </a:p>
           <a:p>
-            <a:pPr>
-              <a:spcAft>
-                <a:spcPts val="1000"/>
-              </a:spcAft>
+            <a:pPr lvl="0" marL="457200" indent="-228600">
+              <a:buFont typeface="Calibri"/>
+              <a:spcAft>
+                <a:spcPts val="1000"/>
+              </a:spcAft>
+              <a:buSzPct val="100000"/>
               <a:buChar char="•"/>
               <a:lnSpc>
                 <a:spcPts val="2200"/>
@@ -22514,10 +23024,12 @@
             </a:r>
           </a:p>
           <a:p>
-            <a:pPr>
-              <a:spcAft>
-                <a:spcPts val="1000"/>
-              </a:spcAft>
+            <a:pPr lvl="0" marL="457200" indent="-228600">
+              <a:buFont typeface="Calibri"/>
+              <a:spcAft>
+                <a:spcPts val="1000"/>
+              </a:spcAft>
+              <a:buSzPct val="100000"/>
               <a:buChar char="•"/>
               <a:lnSpc>
                 <a:spcPts val="2200"/>
@@ -22653,10 +23165,12 @@
           </a:bodyPr>
           <a:lstStyle/>
           <a:p>
-            <a:pPr>
-              <a:spcAft>
-                <a:spcPts val="1000"/>
-              </a:spcAft>
+            <a:pPr lvl="0" marL="457200" indent="-228600">
+              <a:buFont typeface="Calibri"/>
+              <a:spcAft>
+                <a:spcPts val="1000"/>
+              </a:spcAft>
+              <a:buSzPct val="100000"/>
               <a:buChar char="•"/>
               <a:lnSpc>
                 <a:spcPts val="2200"/>
@@ -22673,10 +23187,12 @@
             </a:r>
           </a:p>
           <a:p>
-            <a:pPr>
-              <a:spcAft>
-                <a:spcPts val="1000"/>
-              </a:spcAft>
+            <a:pPr lvl="0" marL="457200" indent="-228600">
+              <a:buFont typeface="Calibri"/>
+              <a:spcAft>
+                <a:spcPts val="1000"/>
+              </a:spcAft>
+              <a:buSzPct val="100000"/>
               <a:buChar char="•"/>
               <a:lnSpc>
                 <a:spcPts val="2200"/>
@@ -22812,10 +23328,12 @@
           </a:bodyPr>
           <a:lstStyle/>
           <a:p>
-            <a:pPr>
-              <a:spcAft>
-                <a:spcPts val="1000"/>
-              </a:spcAft>
+            <a:pPr lvl="0" marL="457200" indent="-228600">
+              <a:buFont typeface="Calibri"/>
+              <a:spcAft>
+                <a:spcPts val="1000"/>
+              </a:spcAft>
+              <a:buSzPct val="100000"/>
               <a:buChar char="•"/>
               <a:lnSpc>
                 <a:spcPts val="2200"/>
@@ -22832,10 +23350,12 @@
             </a:r>
           </a:p>
           <a:p>
-            <a:pPr>
-              <a:spcAft>
-                <a:spcPts val="1000"/>
-              </a:spcAft>
+            <a:pPr lvl="0" marL="457200" indent="-228600">
+              <a:buFont typeface="Calibri"/>
+              <a:spcAft>
+                <a:spcPts val="1000"/>
+              </a:spcAft>
+              <a:buSzPct val="100000"/>
               <a:buChar char="•"/>
               <a:lnSpc>
                 <a:spcPts val="2200"/>
@@ -22852,10 +23372,12 @@
             </a:r>
           </a:p>
           <a:p>
-            <a:pPr>
-              <a:spcAft>
-                <a:spcPts val="1000"/>
-              </a:spcAft>
+            <a:pPr lvl="0" marL="457200" indent="-228600">
+              <a:buFont typeface="Calibri"/>
+              <a:spcAft>
+                <a:spcPts val="1000"/>
+              </a:spcAft>
+              <a:buSzPct val="100000"/>
               <a:buChar char="•"/>
               <a:lnSpc>
                 <a:spcPts val="2200"/>
@@ -22872,10 +23394,12 @@
             </a:r>
           </a:p>
           <a:p>
-            <a:pPr>
-              <a:spcAft>
-                <a:spcPts val="1000"/>
-              </a:spcAft>
+            <a:pPr lvl="0" marL="457200" indent="-228600">
+              <a:buFont typeface="Calibri"/>
+              <a:spcAft>
+                <a:spcPts val="1000"/>
+              </a:spcAft>
+              <a:buSzPct val="100000"/>
               <a:buChar char="•"/>
               <a:lnSpc>
                 <a:spcPts val="2200"/>
@@ -23011,10 +23535,12 @@
           </a:bodyPr>
           <a:lstStyle/>
           <a:p>
-            <a:pPr>
-              <a:spcAft>
-                <a:spcPts val="1000"/>
-              </a:spcAft>
+            <a:pPr lvl="0" marL="457200" indent="-228600">
+              <a:buFont typeface="Calibri"/>
+              <a:spcAft>
+                <a:spcPts val="1000"/>
+              </a:spcAft>
+              <a:buSzPct val="100000"/>
               <a:buChar char="•"/>
               <a:lnSpc>
                 <a:spcPts val="2200"/>
@@ -23031,10 +23557,12 @@
             </a:r>
           </a:p>
           <a:p>
-            <a:pPr>
-              <a:spcAft>
-                <a:spcPts val="1000"/>
-              </a:spcAft>
+            <a:pPr lvl="0" marL="457200" indent="-228600">
+              <a:buFont typeface="Calibri"/>
+              <a:spcAft>
+                <a:spcPts val="1000"/>
+              </a:spcAft>
+              <a:buSzPct val="100000"/>
               <a:buChar char="•"/>
               <a:lnSpc>
                 <a:spcPts val="2200"/>
@@ -23051,10 +23579,12 @@
             </a:r>
           </a:p>
           <a:p>
-            <a:pPr>
-              <a:spcAft>
-                <a:spcPts val="1000"/>
-              </a:spcAft>
+            <a:pPr lvl="0" marL="457200" indent="-228600">
+              <a:buFont typeface="Calibri"/>
+              <a:spcAft>
+                <a:spcPts val="1000"/>
+              </a:spcAft>
+              <a:buSzPct val="100000"/>
               <a:buChar char="•"/>
               <a:lnSpc>
                 <a:spcPts val="2200"/>
@@ -23190,10 +23720,12 @@
           </a:bodyPr>
           <a:lstStyle/>
           <a:p>
-            <a:pPr>
-              <a:spcAft>
-                <a:spcPts val="1000"/>
-              </a:spcAft>
+            <a:pPr lvl="0" marL="457200" indent="-228600">
+              <a:buFont typeface="Calibri"/>
+              <a:spcAft>
+                <a:spcPts val="1000"/>
+              </a:spcAft>
+              <a:buSzPct val="100000"/>
               <a:buChar char="•"/>
               <a:lnSpc>
                 <a:spcPts val="2200"/>
@@ -23210,10 +23742,12 @@
             </a:r>
           </a:p>
           <a:p>
-            <a:pPr>
-              <a:spcAft>
-                <a:spcPts val="1000"/>
-              </a:spcAft>
+            <a:pPr lvl="0" marL="457200" indent="-228600">
+              <a:buFont typeface="Calibri"/>
+              <a:spcAft>
+                <a:spcPts val="1000"/>
+              </a:spcAft>
+              <a:buSzPct val="100000"/>
               <a:buChar char="•"/>
               <a:lnSpc>
                 <a:spcPts val="2200"/>
@@ -23230,10 +23764,12 @@
             </a:r>
           </a:p>
           <a:p>
-            <a:pPr>
-              <a:spcAft>
-                <a:spcPts val="1000"/>
-              </a:spcAft>
+            <a:pPr lvl="0" marL="457200" indent="-228600">
+              <a:buFont typeface="Calibri"/>
+              <a:spcAft>
+                <a:spcPts val="1000"/>
+              </a:spcAft>
+              <a:buSzPct val="100000"/>
               <a:buChar char="•"/>
               <a:lnSpc>
                 <a:spcPts val="2200"/>
@@ -23250,10 +23786,12 @@
             </a:r>
           </a:p>
           <a:p>
-            <a:pPr>
-              <a:spcAft>
-                <a:spcPts val="1000"/>
-              </a:spcAft>
+            <a:pPr lvl="0" marL="457200" indent="-228600">
+              <a:buFont typeface="Calibri"/>
+              <a:spcAft>
+                <a:spcPts val="1000"/>
+              </a:spcAft>
+              <a:buSzPct val="100000"/>
               <a:buChar char="•"/>
               <a:lnSpc>
                 <a:spcPts val="2200"/>
@@ -23389,10 +23927,12 @@
           </a:bodyPr>
           <a:lstStyle/>
           <a:p>
-            <a:pPr>
-              <a:spcAft>
-                <a:spcPts val="1000"/>
-              </a:spcAft>
+            <a:pPr lvl="0" marL="457200" indent="-228600">
+              <a:buFont typeface="Calibri"/>
+              <a:spcAft>
+                <a:spcPts val="1000"/>
+              </a:spcAft>
+              <a:buSzPct val="100000"/>
               <a:buChar char="•"/>
               <a:lnSpc>
                 <a:spcPts val="2200"/>
@@ -23409,10 +23949,12 @@
             </a:r>
           </a:p>
           <a:p>
-            <a:pPr>
-              <a:spcAft>
-                <a:spcPts val="1000"/>
-              </a:spcAft>
+            <a:pPr lvl="0" marL="457200" indent="-228600">
+              <a:buFont typeface="Calibri"/>
+              <a:spcAft>
+                <a:spcPts val="1000"/>
+              </a:spcAft>
+              <a:buSzPct val="100000"/>
               <a:buChar char="•"/>
               <a:lnSpc>
                 <a:spcPts val="2200"/>
@@ -23429,10 +23971,12 @@
             </a:r>
           </a:p>
           <a:p>
-            <a:pPr>
-              <a:spcAft>
-                <a:spcPts val="1000"/>
-              </a:spcAft>
+            <a:pPr lvl="0" marL="457200" indent="-228600">
+              <a:buFont typeface="Calibri"/>
+              <a:spcAft>
+                <a:spcPts val="1000"/>
+              </a:spcAft>
+              <a:buSzPct val="100000"/>
               <a:buChar char="•"/>
               <a:lnSpc>
                 <a:spcPts val="2200"/>
@@ -23449,10 +23993,12 @@
             </a:r>
           </a:p>
           <a:p>
-            <a:pPr>
-              <a:spcAft>
-                <a:spcPts val="1000"/>
-              </a:spcAft>
+            <a:pPr lvl="0" marL="457200" indent="-228600">
+              <a:buFont typeface="Calibri"/>
+              <a:spcAft>
+                <a:spcPts val="1000"/>
+              </a:spcAft>
+              <a:buSzPct val="100000"/>
               <a:buChar char="•"/>
               <a:lnSpc>
                 <a:spcPts val="2200"/>
@@ -23469,10 +24015,12 @@
             </a:r>
           </a:p>
           <a:p>
-            <a:pPr>
-              <a:spcAft>
-                <a:spcPts val="1000"/>
-              </a:spcAft>
+            <a:pPr lvl="0" marL="457200" indent="-228600">
+              <a:buFont typeface="Calibri"/>
+              <a:spcAft>
+                <a:spcPts val="1000"/>
+              </a:spcAft>
+              <a:buSzPct val="100000"/>
               <a:buChar char="•"/>
               <a:lnSpc>
                 <a:spcPts val="2200"/>
@@ -23489,10 +24037,12 @@
             </a:r>
           </a:p>
           <a:p>
-            <a:pPr>
-              <a:spcAft>
-                <a:spcPts val="1000"/>
-              </a:spcAft>
+            <a:pPr lvl="0" marL="457200" indent="-228600">
+              <a:buFont typeface="Calibri"/>
+              <a:spcAft>
+                <a:spcPts val="1000"/>
+              </a:spcAft>
+              <a:buSzPct val="100000"/>
               <a:buChar char="•"/>
               <a:lnSpc>
                 <a:spcPts val="2200"/>
@@ -23628,10 +24178,12 @@
           </a:bodyPr>
           <a:lstStyle/>
           <a:p>
-            <a:pPr>
-              <a:spcAft>
-                <a:spcPts val="1000"/>
-              </a:spcAft>
+            <a:pPr lvl="0" marL="457200" indent="-228600">
+              <a:buFont typeface="Calibri"/>
+              <a:spcAft>
+                <a:spcPts val="1000"/>
+              </a:spcAft>
+              <a:buSzPct val="100000"/>
               <a:buChar char="•"/>
               <a:lnSpc>
                 <a:spcPts val="2200"/>
@@ -23648,10 +24200,12 @@
             </a:r>
           </a:p>
           <a:p>
-            <a:pPr>
-              <a:spcAft>
-                <a:spcPts val="1000"/>
-              </a:spcAft>
+            <a:pPr lvl="0" marL="457200" indent="-228600">
+              <a:buFont typeface="Calibri"/>
+              <a:spcAft>
+                <a:spcPts val="1000"/>
+              </a:spcAft>
+              <a:buSzPct val="100000"/>
               <a:buChar char="•"/>
               <a:lnSpc>
                 <a:spcPts val="2200"/>
@@ -23668,10 +24222,12 @@
             </a:r>
           </a:p>
           <a:p>
-            <a:pPr>
-              <a:spcAft>
-                <a:spcPts val="1000"/>
-              </a:spcAft>
+            <a:pPr lvl="0" marL="457200" indent="-228600">
+              <a:buFont typeface="Calibri"/>
+              <a:spcAft>
+                <a:spcPts val="1000"/>
+              </a:spcAft>
+              <a:buSzPct val="100000"/>
               <a:buChar char="•"/>
               <a:lnSpc>
                 <a:spcPts val="2200"/>
@@ -23807,10 +24363,12 @@
           </a:bodyPr>
           <a:lstStyle/>
           <a:p>
-            <a:pPr>
-              <a:spcAft>
-                <a:spcPts val="1000"/>
-              </a:spcAft>
+            <a:pPr lvl="0" marL="457200" indent="-228600">
+              <a:buFont typeface="Calibri"/>
+              <a:spcAft>
+                <a:spcPts val="1000"/>
+              </a:spcAft>
+              <a:buSzPct val="100000"/>
               <a:buChar char="•"/>
               <a:lnSpc>
                 <a:spcPts val="2200"/>
@@ -23827,10 +24385,12 @@
             </a:r>
           </a:p>
           <a:p>
-            <a:pPr>
-              <a:spcAft>
-                <a:spcPts val="1000"/>
-              </a:spcAft>
+            <a:pPr lvl="0" marL="457200" indent="-228600">
+              <a:buFont typeface="Calibri"/>
+              <a:spcAft>
+                <a:spcPts val="1000"/>
+              </a:spcAft>
+              <a:buSzPct val="100000"/>
               <a:buChar char="•"/>
               <a:lnSpc>
                 <a:spcPts val="2200"/>
@@ -23847,10 +24407,12 @@
             </a:r>
           </a:p>
           <a:p>
-            <a:pPr>
-              <a:spcAft>
-                <a:spcPts val="1000"/>
-              </a:spcAft>
+            <a:pPr lvl="0" marL="457200" indent="-228600">
+              <a:buFont typeface="Calibri"/>
+              <a:spcAft>
+                <a:spcPts val="1000"/>
+              </a:spcAft>
+              <a:buSzPct val="100000"/>
               <a:buChar char="•"/>
               <a:lnSpc>
                 <a:spcPts val="2200"/>
@@ -23867,10 +24429,12 @@
             </a:r>
           </a:p>
           <a:p>
-            <a:pPr>
-              <a:spcAft>
-                <a:spcPts val="1000"/>
-              </a:spcAft>
+            <a:pPr lvl="0" marL="457200" indent="-228600">
+              <a:buFont typeface="Calibri"/>
+              <a:spcAft>
+                <a:spcPts val="1000"/>
+              </a:spcAft>
+              <a:buSzPct val="100000"/>
               <a:buChar char="•"/>
               <a:lnSpc>
                 <a:spcPts val="2200"/>
@@ -24006,10 +24570,12 @@
           </a:bodyPr>
           <a:lstStyle/>
           <a:p>
-            <a:pPr>
-              <a:spcAft>
-                <a:spcPts val="1000"/>
-              </a:spcAft>
+            <a:pPr lvl="0" marL="457200" indent="-228600">
+              <a:buFont typeface="Calibri"/>
+              <a:spcAft>
+                <a:spcPts val="1000"/>
+              </a:spcAft>
+              <a:buSzPct val="100000"/>
               <a:buChar char="•"/>
               <a:lnSpc>
                 <a:spcPts val="2200"/>
@@ -24026,10 +24592,12 @@
             </a:r>
           </a:p>
           <a:p>
-            <a:pPr>
-              <a:spcAft>
-                <a:spcPts val="1000"/>
-              </a:spcAft>
+            <a:pPr lvl="0" marL="457200" indent="-228600">
+              <a:buFont typeface="Calibri"/>
+              <a:spcAft>
+                <a:spcPts val="1000"/>
+              </a:spcAft>
+              <a:buSzPct val="100000"/>
               <a:buChar char="•"/>
               <a:lnSpc>
                 <a:spcPts val="2200"/>
@@ -24046,10 +24614,12 @@
             </a:r>
           </a:p>
           <a:p>
-            <a:pPr>
-              <a:spcAft>
-                <a:spcPts val="1000"/>
-              </a:spcAft>
+            <a:pPr lvl="0" marL="457200" indent="-228600">
+              <a:buFont typeface="Calibri"/>
+              <a:spcAft>
+                <a:spcPts val="1000"/>
+              </a:spcAft>
+              <a:buSzPct val="100000"/>
               <a:buChar char="•"/>
               <a:lnSpc>
                 <a:spcPts val="2200"/>
@@ -24185,10 +24755,12 @@
           </a:bodyPr>
           <a:lstStyle/>
           <a:p>
-            <a:pPr>
-              <a:spcAft>
-                <a:spcPts val="1000"/>
-              </a:spcAft>
+            <a:pPr lvl="0" marL="457200" indent="-228600">
+              <a:buFont typeface="Calibri"/>
+              <a:spcAft>
+                <a:spcPts val="1000"/>
+              </a:spcAft>
+              <a:buSzPct val="100000"/>
               <a:buChar char="•"/>
               <a:lnSpc>
                 <a:spcPts val="2200"/>
@@ -24205,10 +24777,12 @@
             </a:r>
           </a:p>
           <a:p>
-            <a:pPr>
-              <a:spcAft>
-                <a:spcPts val="1000"/>
-              </a:spcAft>
+            <a:pPr lvl="0" marL="457200" indent="-228600">
+              <a:buFont typeface="Calibri"/>
+              <a:spcAft>
+                <a:spcPts val="1000"/>
+              </a:spcAft>
+              <a:buSzPct val="100000"/>
               <a:buChar char="•"/>
               <a:lnSpc>
                 <a:spcPts val="2200"/>
@@ -24225,10 +24799,12 @@
             </a:r>
           </a:p>
           <a:p>
-            <a:pPr>
-              <a:spcAft>
-                <a:spcPts val="1000"/>
-              </a:spcAft>
+            <a:pPr lvl="0" marL="457200" indent="-228600">
+              <a:buFont typeface="Calibri"/>
+              <a:spcAft>
+                <a:spcPts val="1000"/>
+              </a:spcAft>
+              <a:buSzPct val="100000"/>
               <a:buChar char="•"/>
               <a:lnSpc>
                 <a:spcPts val="2200"/>
@@ -24245,10 +24821,12 @@
             </a:r>
           </a:p>
           <a:p>
-            <a:pPr>
-              <a:spcAft>
-                <a:spcPts val="1000"/>
-              </a:spcAft>
+            <a:pPr lvl="0" marL="457200" indent="-228600">
+              <a:buFont typeface="Calibri"/>
+              <a:spcAft>
+                <a:spcPts val="1000"/>
+              </a:spcAft>
+              <a:buSzPct val="100000"/>
               <a:buChar char="•"/>
               <a:lnSpc>
                 <a:spcPts val="2200"/>
@@ -24265,10 +24843,12 @@
             </a:r>
           </a:p>
           <a:p>
-            <a:pPr>
-              <a:spcAft>
-                <a:spcPts val="1000"/>
-              </a:spcAft>
+            <a:pPr lvl="0" marL="457200" indent="-228600">
+              <a:buFont typeface="Calibri"/>
+              <a:spcAft>
+                <a:spcPts val="1000"/>
+              </a:spcAft>
+              <a:buSzPct val="100000"/>
               <a:buChar char="•"/>
               <a:lnSpc>
                 <a:spcPts val="2200"/>
@@ -24285,10 +24865,12 @@
             </a:r>
           </a:p>
           <a:p>
-            <a:pPr>
-              <a:spcAft>
-                <a:spcPts val="1000"/>
-              </a:spcAft>
+            <a:pPr lvl="0" marL="457200" indent="-228600">
+              <a:buFont typeface="Calibri"/>
+              <a:spcAft>
+                <a:spcPts val="1000"/>
+              </a:spcAft>
+              <a:buSzPct val="100000"/>
               <a:buChar char="•"/>
               <a:lnSpc>
                 <a:spcPts val="2200"/>
@@ -24424,10 +25006,12 @@
           </a:bodyPr>
           <a:lstStyle/>
           <a:p>
-            <a:pPr>
-              <a:spcAft>
-                <a:spcPts val="1000"/>
-              </a:spcAft>
+            <a:pPr lvl="0" marL="457200" indent="-228600">
+              <a:buFont typeface="Calibri"/>
+              <a:spcAft>
+                <a:spcPts val="1000"/>
+              </a:spcAft>
+              <a:buSzPct val="100000"/>
               <a:buChar char="•"/>
               <a:lnSpc>
                 <a:spcPts val="2200"/>
@@ -24444,10 +25028,12 @@
             </a:r>
           </a:p>
           <a:p>
-            <a:pPr>
-              <a:spcAft>
-                <a:spcPts val="1000"/>
-              </a:spcAft>
+            <a:pPr lvl="0" marL="457200" indent="-228600">
+              <a:buFont typeface="Calibri"/>
+              <a:spcAft>
+                <a:spcPts val="1000"/>
+              </a:spcAft>
+              <a:buSzPct val="100000"/>
               <a:buChar char="•"/>
               <a:lnSpc>
                 <a:spcPts val="2200"/>
@@ -24464,10 +25050,12 @@
             </a:r>
           </a:p>
           <a:p>
-            <a:pPr>
-              <a:spcAft>
-                <a:spcPts val="1000"/>
-              </a:spcAft>
+            <a:pPr lvl="0" marL="457200" indent="-228600">
+              <a:buFont typeface="Calibri"/>
+              <a:spcAft>
+                <a:spcPts val="1000"/>
+              </a:spcAft>
+              <a:buSzPct val="100000"/>
               <a:buChar char="•"/>
               <a:lnSpc>
                 <a:spcPts val="2200"/>
@@ -24603,10 +25191,12 @@
           </a:bodyPr>
           <a:lstStyle/>
           <a:p>
-            <a:pPr>
-              <a:spcAft>
-                <a:spcPts val="1000"/>
-              </a:spcAft>
+            <a:pPr lvl="0" marL="457200" indent="-228600">
+              <a:buFont typeface="Calibri"/>
+              <a:spcAft>
+                <a:spcPts val="1000"/>
+              </a:spcAft>
+              <a:buSzPct val="100000"/>
               <a:buChar char="•"/>
               <a:lnSpc>
                 <a:spcPts val="2200"/>
@@ -24623,10 +25213,12 @@
             </a:r>
           </a:p>
           <a:p>
-            <a:pPr>
-              <a:spcAft>
-                <a:spcPts val="1000"/>
-              </a:spcAft>
+            <a:pPr lvl="0" marL="457200" indent="-228600">
+              <a:buFont typeface="Calibri"/>
+              <a:spcAft>
+                <a:spcPts val="1000"/>
+              </a:spcAft>
+              <a:buSzPct val="100000"/>
               <a:buChar char="•"/>
               <a:lnSpc>
                 <a:spcPts val="2200"/>
@@ -24643,10 +25235,12 @@
             </a:r>
           </a:p>
           <a:p>
-            <a:pPr>
-              <a:spcAft>
-                <a:spcPts val="1000"/>
-              </a:spcAft>
+            <a:pPr lvl="0" marL="457200" indent="-228600">
+              <a:buFont typeface="Calibri"/>
+              <a:spcAft>
+                <a:spcPts val="1000"/>
+              </a:spcAft>
+              <a:buSzPct val="100000"/>
               <a:buChar char="•"/>
               <a:lnSpc>
                 <a:spcPts val="2200"/>
@@ -24663,10 +25257,12 @@
             </a:r>
           </a:p>
           <a:p>
-            <a:pPr>
-              <a:spcAft>
-                <a:spcPts val="1000"/>
-              </a:spcAft>
+            <a:pPr lvl="0" marL="457200" indent="-228600">
+              <a:buFont typeface="Calibri"/>
+              <a:spcAft>
+                <a:spcPts val="1000"/>
+              </a:spcAft>
+              <a:buSzPct val="100000"/>
               <a:buChar char="•"/>
               <a:lnSpc>
                 <a:spcPts val="2200"/>
@@ -24683,10 +25279,12 @@
             </a:r>
           </a:p>
           <a:p>
-            <a:pPr>
-              <a:spcAft>
-                <a:spcPts val="1000"/>
-              </a:spcAft>
+            <a:pPr lvl="0" marL="457200" indent="-228600">
+              <a:buFont typeface="Calibri"/>
+              <a:spcAft>
+                <a:spcPts val="1000"/>
+              </a:spcAft>
+              <a:buSzPct val="100000"/>
               <a:buChar char="•"/>
               <a:lnSpc>
                 <a:spcPts val="2200"/>
@@ -24822,10 +25420,12 @@
           </a:bodyPr>
           <a:lstStyle/>
           <a:p>
-            <a:pPr>
-              <a:spcAft>
-                <a:spcPts val="1000"/>
-              </a:spcAft>
+            <a:pPr lvl="0" marL="457200" indent="-228600">
+              <a:buFont typeface="Calibri"/>
+              <a:spcAft>
+                <a:spcPts val="1000"/>
+              </a:spcAft>
+              <a:buSzPct val="100000"/>
               <a:buChar char="•"/>
               <a:lnSpc>
                 <a:spcPts val="2200"/>
@@ -24842,10 +25442,12 @@
             </a:r>
           </a:p>
           <a:p>
-            <a:pPr>
-              <a:spcAft>
-                <a:spcPts val="1000"/>
-              </a:spcAft>
+            <a:pPr lvl="0" marL="457200" indent="-228600">
+              <a:buFont typeface="Calibri"/>
+              <a:spcAft>
+                <a:spcPts val="1000"/>
+              </a:spcAft>
+              <a:buSzPct val="100000"/>
               <a:buChar char="•"/>
               <a:lnSpc>
                 <a:spcPts val="2200"/>
@@ -24862,10 +25464,12 @@
             </a:r>
           </a:p>
           <a:p>
-            <a:pPr>
-              <a:spcAft>
-                <a:spcPts val="1000"/>
-              </a:spcAft>
+            <a:pPr lvl="0" marL="457200" indent="-228600">
+              <a:buFont typeface="Calibri"/>
+              <a:spcAft>
+                <a:spcPts val="1000"/>
+              </a:spcAft>
+              <a:buSzPct val="100000"/>
               <a:buChar char="•"/>
               <a:lnSpc>
                 <a:spcPts val="2200"/>
@@ -24882,10 +25486,12 @@
             </a:r>
           </a:p>
           <a:p>
-            <a:pPr>
-              <a:spcAft>
-                <a:spcPts val="1000"/>
-              </a:spcAft>
+            <a:pPr lvl="0" marL="457200" indent="-228600">
+              <a:buFont typeface="Calibri"/>
+              <a:spcAft>
+                <a:spcPts val="1000"/>
+              </a:spcAft>
+              <a:buSzPct val="100000"/>
               <a:buChar char="•"/>
               <a:lnSpc>
                 <a:spcPts val="2200"/>
@@ -25021,10 +25627,12 @@
           </a:bodyPr>
           <a:lstStyle/>
           <a:p>
-            <a:pPr>
-              <a:spcAft>
-                <a:spcPts val="1000"/>
-              </a:spcAft>
+            <a:pPr lvl="0" marL="457200" indent="-228600">
+              <a:buFont typeface="Calibri"/>
+              <a:spcAft>
+                <a:spcPts val="1000"/>
+              </a:spcAft>
+              <a:buSzPct val="100000"/>
               <a:buChar char="•"/>
               <a:lnSpc>
                 <a:spcPts val="2200"/>
@@ -25041,10 +25649,12 @@
             </a:r>
           </a:p>
           <a:p>
-            <a:pPr>
-              <a:spcAft>
-                <a:spcPts val="1000"/>
-              </a:spcAft>
+            <a:pPr lvl="0" marL="457200" indent="-228600">
+              <a:buFont typeface="Calibri"/>
+              <a:spcAft>
+                <a:spcPts val="1000"/>
+              </a:spcAft>
+              <a:buSzPct val="100000"/>
               <a:buChar char="•"/>
               <a:lnSpc>
                 <a:spcPts val="2200"/>
@@ -25180,10 +25790,12 @@
           </a:bodyPr>
           <a:lstStyle/>
           <a:p>
-            <a:pPr>
-              <a:spcAft>
-                <a:spcPts val="1000"/>
-              </a:spcAft>
+            <a:pPr lvl="0" marL="457200" indent="-228600">
+              <a:buFont typeface="Calibri"/>
+              <a:spcAft>
+                <a:spcPts val="1000"/>
+              </a:spcAft>
+              <a:buSzPct val="100000"/>
               <a:buChar char="•"/>
               <a:lnSpc>
                 <a:spcPts val="2200"/>
@@ -25200,10 +25812,12 @@
             </a:r>
           </a:p>
           <a:p>
-            <a:pPr>
-              <a:spcAft>
-                <a:spcPts val="1000"/>
-              </a:spcAft>
+            <a:pPr lvl="0" marL="457200" indent="-228600">
+              <a:buFont typeface="Calibri"/>
+              <a:spcAft>
+                <a:spcPts val="1000"/>
+              </a:spcAft>
+              <a:buSzPct val="100000"/>
               <a:buChar char="•"/>
               <a:lnSpc>
                 <a:spcPts val="2200"/>
